--- a/samples/saidot-gft/saidot-gft.pptx
+++ b/samples/saidot-gft/saidot-gft.pptx
@@ -11,12 +11,14 @@
     <p:sldId id="259" r:id="rId5"/>
     <p:sldId id="260" r:id="rId6"/>
     <p:sldId id="261" r:id="rId7"/>
+    <p:sldId id="262" r:id="rId8"/>
+    <p:sldId id="263" r:id="rId9"/>
   </p:sldIdLst>
   <p:notesMasterIdLst>
-    <p:notesMasterId r:id="rId8"/>
+    <p:notesMasterId r:id="rId10"/>
   </p:notesMasterIdLst>
-  <p:sldSz cx="12192000" cy="6857959"/>
-  <p:notesSz cx="6857959" cy="12192000"/>
+  <p:sldSz cx="12192000" cy="6858000"/>
+  <p:notesSz cx="6858000" cy="12192000"/>
   <p:defaultTextStyle>
     <a:lvl1pPr marL="0" algn="l" defTabSz="914400" rtl="0" eaLnBrk="1" latinLnBrk="0" hangingPunct="1">
       <a:defRPr sz="1800" kern="1200">
@@ -971,6 +973,182 @@
             <a:fld id="{F7021451-1387-4CA6-816F-3879F97B5CBC}" type="slidenum">
               <a:rPr lang="en-US"/>
               <a:t>6</a:t>
+            </a:fld>
+            <a:endParaRPr lang="en-US"/>
+          </a:p>
+        </p:txBody>
+      </p:sp>
+    </p:spTree>
+    <p:extLst>
+      <p:ext uri="{BB962C8B-B14F-4D97-AF65-F5344CB8AC3E}">
+        <p14:creationId xmlns:p14="http://schemas.microsoft.com/office/powerpoint/2010/main" val="1024086991"/>
+      </p:ext>
+    </p:extLst>
+  </p:cSld>
+  <p:clrMapOvr>
+    <a:masterClrMapping/>
+  </p:clrMapOvr>
+</p:notes>
+</file>
+
+<file path=ppt/notesSlides/notesSlide7.xml><?xml version="1.0" encoding="utf-8"?>
+<p:notes xmlns:a="http://schemas.openxmlformats.org/drawingml/2006/main" xmlns:r="http://schemas.openxmlformats.org/officeDocument/2006/relationships" xmlns:p="http://schemas.openxmlformats.org/presentationml/2006/main">
+  <p:cSld>
+    <p:spTree>
+      <p:nvGrpSpPr>
+        <p:cNvPr id="1" name=""/>
+        <p:cNvGrpSpPr/>
+        <p:nvPr/>
+      </p:nvGrpSpPr>
+      <p:grpSpPr>
+        <a:xfrm>
+          <a:off x="0" y="0"/>
+          <a:ext cx="0" cy="0"/>
+          <a:chOff x="0" y="0"/>
+          <a:chExt cx="0" cy="0"/>
+        </a:xfrm>
+      </p:grpSpPr>
+      <p:sp>
+        <p:nvSpPr>
+          <p:cNvPr id="2" name="Slide Image Placeholder 1"/>
+          <p:cNvSpPr>
+            <a:spLocks noGrp="1" noRot="1" noChangeAspect="1"/>
+          </p:cNvSpPr>
+          <p:nvPr>
+            <p:ph type="sldImg"/>
+          </p:nvPr>
+        </p:nvSpPr>
+        <p:spPr/>
+      </p:sp>
+      <p:sp>
+        <p:nvSpPr>
+          <p:cNvPr id="3" name="Notes Placeholder 2"/>
+          <p:cNvSpPr>
+            <a:spLocks noGrp="1"/>
+          </p:cNvSpPr>
+          <p:nvPr>
+            <p:ph type="body" idx="1"/>
+          </p:nvPr>
+        </p:nvSpPr>
+        <p:spPr/>
+        <p:txBody>
+          <a:bodyPr/>
+          <a:lstStyle/>
+          <a:p>
+            <a:r>
+              <a:rPr lang="en-US" dirty="0"/>
+              <a:t/>
+            </a:r>
+            <a:endParaRPr lang="en-US" dirty="0"/>
+          </a:p>
+        </p:txBody>
+      </p:sp>
+      <p:sp>
+        <p:nvSpPr>
+          <p:cNvPr id="4" name="Slide Number Placeholder 3"/>
+          <p:cNvSpPr>
+            <a:spLocks noGrp="1"/>
+          </p:cNvSpPr>
+          <p:nvPr>
+            <p:ph type="sldNum" sz="quarter" idx="10"/>
+          </p:nvPr>
+        </p:nvSpPr>
+        <p:spPr/>
+        <p:txBody>
+          <a:bodyPr/>
+          <a:lstStyle/>
+          <a:p>
+            <a:fld id="{F7021451-1387-4CA6-816F-3879F97B5CBC}" type="slidenum">
+              <a:rPr lang="en-US"/>
+              <a:t>7</a:t>
+            </a:fld>
+            <a:endParaRPr lang="en-US"/>
+          </a:p>
+        </p:txBody>
+      </p:sp>
+    </p:spTree>
+    <p:extLst>
+      <p:ext uri="{BB962C8B-B14F-4D97-AF65-F5344CB8AC3E}">
+        <p14:creationId xmlns:p14="http://schemas.microsoft.com/office/powerpoint/2010/main" val="1024086991"/>
+      </p:ext>
+    </p:extLst>
+  </p:cSld>
+  <p:clrMapOvr>
+    <a:masterClrMapping/>
+  </p:clrMapOvr>
+</p:notes>
+</file>
+
+<file path=ppt/notesSlides/notesSlide8.xml><?xml version="1.0" encoding="utf-8"?>
+<p:notes xmlns:a="http://schemas.openxmlformats.org/drawingml/2006/main" xmlns:r="http://schemas.openxmlformats.org/officeDocument/2006/relationships" xmlns:p="http://schemas.openxmlformats.org/presentationml/2006/main">
+  <p:cSld>
+    <p:spTree>
+      <p:nvGrpSpPr>
+        <p:cNvPr id="1" name=""/>
+        <p:cNvGrpSpPr/>
+        <p:nvPr/>
+      </p:nvGrpSpPr>
+      <p:grpSpPr>
+        <a:xfrm>
+          <a:off x="0" y="0"/>
+          <a:ext cx="0" cy="0"/>
+          <a:chOff x="0" y="0"/>
+          <a:chExt cx="0" cy="0"/>
+        </a:xfrm>
+      </p:grpSpPr>
+      <p:sp>
+        <p:nvSpPr>
+          <p:cNvPr id="2" name="Slide Image Placeholder 1"/>
+          <p:cNvSpPr>
+            <a:spLocks noGrp="1" noRot="1" noChangeAspect="1"/>
+          </p:cNvSpPr>
+          <p:nvPr>
+            <p:ph type="sldImg"/>
+          </p:nvPr>
+        </p:nvSpPr>
+        <p:spPr/>
+      </p:sp>
+      <p:sp>
+        <p:nvSpPr>
+          <p:cNvPr id="3" name="Notes Placeholder 2"/>
+          <p:cNvSpPr>
+            <a:spLocks noGrp="1"/>
+          </p:cNvSpPr>
+          <p:nvPr>
+            <p:ph type="body" idx="1"/>
+          </p:nvPr>
+        </p:nvSpPr>
+        <p:spPr/>
+        <p:txBody>
+          <a:bodyPr/>
+          <a:lstStyle/>
+          <a:p>
+            <a:r>
+              <a:rPr lang="en-US" dirty="0"/>
+              <a:t/>
+            </a:r>
+            <a:endParaRPr lang="en-US" dirty="0"/>
+          </a:p>
+        </p:txBody>
+      </p:sp>
+      <p:sp>
+        <p:nvSpPr>
+          <p:cNvPr id="4" name="Slide Number Placeholder 3"/>
+          <p:cNvSpPr>
+            <a:spLocks noGrp="1"/>
+          </p:cNvSpPr>
+          <p:nvPr>
+            <p:ph type="sldNum" sz="quarter" idx="10"/>
+          </p:nvPr>
+        </p:nvSpPr>
+        <p:spPr/>
+        <p:txBody>
+          <a:bodyPr/>
+          <a:lstStyle/>
+          <a:p>
+            <a:fld id="{F7021451-1387-4CA6-816F-3879F97B5CBC}" type="slidenum">
+              <a:rPr lang="en-US"/>
+              <a:t>8</a:t>
             </a:fld>
             <a:endParaRPr lang="en-US"/>
           </a:p>
@@ -1330,388 +1508,236 @@
         <p:spPr>
           <a:xfrm>
             <a:off x="0" y="0"/>
-            <a:ext cx="12192000" cy="6857959"/>
+            <a:ext cx="12192000" cy="6858000"/>
           </a:xfrm>
           <a:prstGeom prst="rect">
             <a:avLst/>
           </a:prstGeom>
         </p:spPr>
       </p:pic>
-      <p:sp>
-        <p:nvSpPr>
-          <p:cNvPr id="3" name="Text 0"/>
-          <p:cNvSpPr/>
-          <p:nvPr/>
-        </p:nvSpPr>
-        <p:spPr>
-          <a:xfrm>
-            <a:off x="830521" y="861395"/>
-            <a:ext cx="10530958" cy="247445"/>
-          </a:xfrm>
-          <a:prstGeom prst="rect">
-            <a:avLst/>
-          </a:prstGeom>
-          <a:noFill/>
-          <a:ln/>
-        </p:spPr>
-        <p:txBody>
-          <a:bodyPr wrap="square" lIns="0" tIns="0" rIns="0" bIns="0" rtlCol="0" anchor="t"/>
-          <a:lstStyle/>
-          <a:p>
-            <a:pPr algn="l" indent="0" marL="0">
-              <a:lnSpc>
-                <a:spcPts val="1950"/>
-              </a:lnSpc>
-              <a:buNone/>
-            </a:pPr>
-            <a:r>
-              <a:rPr lang="en-US" sz="1300" b="1" dirty="0">
-                <a:solidFill>
-                  <a:srgbClr val="3150FF"/>
-                </a:solidFill>
-                <a:latin typeface="Inter" pitchFamily="34" charset="0"/>
-                <a:ea typeface="Inter" pitchFamily="34" charset="-122"/>
-                <a:cs typeface="Inter" pitchFamily="34" charset="-120"/>
-              </a:rPr>
-              <a:t>Runtime enforcement</a:t>
-            </a:r>
-            <a:endParaRPr lang="en-US" sz="1300" dirty="0"/>
-          </a:p>
-        </p:txBody>
-      </p:sp>
-      <p:sp>
-        <p:nvSpPr>
-          <p:cNvPr id="4" name="Text 1"/>
-          <p:cNvSpPr/>
-          <p:nvPr/>
-        </p:nvSpPr>
-        <p:spPr>
-          <a:xfrm>
-            <a:off x="830521" y="1410254"/>
-            <a:ext cx="10530958" cy="554583"/>
-          </a:xfrm>
-          <a:prstGeom prst="rect">
-            <a:avLst/>
-          </a:prstGeom>
-          <a:noFill/>
-          <a:ln/>
-        </p:spPr>
-        <p:txBody>
-          <a:bodyPr wrap="square" lIns="0" tIns="0" rIns="0" bIns="0" rtlCol="0" anchor="t"/>
-          <a:lstStyle/>
-          <a:p>
-            <a:pPr algn="l" indent="0" marL="0">
-              <a:lnSpc>
-                <a:spcPts val="4370"/>
-              </a:lnSpc>
-              <a:buNone/>
-            </a:pPr>
-            <a:r>
-              <a:rPr lang="en-US" sz="3900" dirty="0">
-                <a:solidFill>
-                  <a:srgbClr val="000000"/>
-                </a:solidFill>
-                <a:latin typeface="Copyright Peregrin Studio" pitchFamily="34" charset="0"/>
-                <a:ea typeface="Copyright Peregrin Studio" pitchFamily="34" charset="-122"/>
-                <a:cs typeface="Copyright Peregrin Studio" pitchFamily="34" charset="-120"/>
-              </a:rPr>
-              <a:t>The systems being governed are in flux</a:t>
-            </a:r>
-            <a:endParaRPr lang="en-US" sz="3900" dirty="0"/>
-          </a:p>
-        </p:txBody>
-      </p:sp>
-      <p:sp>
-        <p:nvSpPr>
-          <p:cNvPr id="5" name="Text 2"/>
-          <p:cNvSpPr/>
-          <p:nvPr/>
-        </p:nvSpPr>
-        <p:spPr>
-          <a:xfrm>
-            <a:off x="1079601" y="2885763"/>
-            <a:ext cx="2841696" cy="298307"/>
-          </a:xfrm>
-          <a:prstGeom prst="rect">
-            <a:avLst/>
-          </a:prstGeom>
-          <a:noFill/>
-          <a:ln/>
-        </p:spPr>
-        <p:txBody>
-          <a:bodyPr wrap="square" lIns="0" tIns="0" rIns="0" bIns="0" rtlCol="0" anchor="t"/>
-          <a:lstStyle/>
-          <a:p>
-            <a:pPr algn="l" indent="0" marL="0">
-              <a:lnSpc>
-                <a:spcPts val="2350"/>
-              </a:lnSpc>
-              <a:buNone/>
-            </a:pPr>
-            <a:r>
-              <a:rPr lang="en-US" sz="1570" b="1" dirty="0">
-                <a:solidFill>
-                  <a:srgbClr val="252525"/>
-                </a:solidFill>
-                <a:latin typeface="Inter" pitchFamily="34" charset="0"/>
-                <a:ea typeface="Inter" pitchFamily="34" charset="-122"/>
-                <a:cs typeface="Inter" pitchFamily="34" charset="-120"/>
-              </a:rPr>
-              <a:t>Models</a:t>
-            </a:r>
-            <a:endParaRPr lang="en-US" sz="1570" dirty="0"/>
-          </a:p>
-        </p:txBody>
-      </p:sp>
-      <p:sp>
-        <p:nvSpPr>
-          <p:cNvPr id="6" name="Text 3"/>
-          <p:cNvSpPr/>
-          <p:nvPr/>
-        </p:nvSpPr>
-        <p:spPr>
-          <a:xfrm>
-            <a:off x="1079601" y="3253577"/>
-            <a:ext cx="2841696" cy="1097718"/>
-          </a:xfrm>
-          <a:prstGeom prst="rect">
-            <a:avLst/>
-          </a:prstGeom>
-          <a:noFill/>
-          <a:ln/>
-        </p:spPr>
-        <p:txBody>
-          <a:bodyPr wrap="square" lIns="0" tIns="0" rIns="0" bIns="0" rtlCol="0" anchor="t"/>
-          <a:lstStyle/>
-          <a:p>
-            <a:pPr algn="l" indent="0" marL="0">
-              <a:lnSpc>
-                <a:spcPts val="2160"/>
-              </a:lnSpc>
-              <a:buNone/>
-            </a:pPr>
-            <a:r>
-              <a:rPr lang="en-US" sz="1440" dirty="0">
-                <a:solidFill>
-                  <a:srgbClr val="626262"/>
-                </a:solidFill>
-                <a:latin typeface="Inter" pitchFamily="34" charset="0"/>
-                <a:ea typeface="Inter" pitchFamily="34" charset="-122"/>
-                <a:cs typeface="Inter" pitchFamily="34" charset="-120"/>
-              </a:rPr>
-              <a:t>Swapped for a newer version, another provider; or a fine-tune, and every system built on the old one inherits the change.</a:t>
-            </a:r>
-            <a:endParaRPr lang="en-US" sz="1440" dirty="0"/>
-          </a:p>
-        </p:txBody>
-      </p:sp>
-      <p:sp>
-        <p:nvSpPr>
-          <p:cNvPr id="7" name="Text 4"/>
-          <p:cNvSpPr/>
-          <p:nvPr/>
-        </p:nvSpPr>
-        <p:spPr>
-          <a:xfrm>
-            <a:off x="4675152" y="2885763"/>
-            <a:ext cx="2841696" cy="596614"/>
-          </a:xfrm>
-          <a:prstGeom prst="rect">
-            <a:avLst/>
-          </a:prstGeom>
-          <a:noFill/>
-          <a:ln/>
-        </p:spPr>
-        <p:txBody>
-          <a:bodyPr wrap="square" lIns="0" tIns="0" rIns="0" bIns="0" rtlCol="0" anchor="t"/>
-          <a:lstStyle/>
-          <a:p>
-            <a:pPr algn="l" indent="0" marL="0">
-              <a:lnSpc>
-                <a:spcPts val="2350"/>
-              </a:lnSpc>
-              <a:buNone/>
-            </a:pPr>
-            <a:r>
-              <a:rPr lang="en-US" sz="1570" b="1" dirty="0">
-                <a:solidFill>
-                  <a:srgbClr val="252525"/>
-                </a:solidFill>
-                <a:latin typeface="Inter" pitchFamily="34" charset="0"/>
-                <a:ea typeface="Inter" pitchFamily="34" charset="-122"/>
-                <a:cs typeface="Inter" pitchFamily="34" charset="-120"/>
-              </a:rPr>
-              <a:t>Agents and the platforms they run on</a:t>
-            </a:r>
-            <a:endParaRPr lang="en-US" sz="1570" dirty="0"/>
-          </a:p>
-        </p:txBody>
-      </p:sp>
-      <p:sp>
-        <p:nvSpPr>
-          <p:cNvPr id="8" name="Text 5"/>
-          <p:cNvSpPr/>
-          <p:nvPr/>
-        </p:nvSpPr>
-        <p:spPr>
-          <a:xfrm>
-            <a:off x="4675152" y="3551884"/>
-            <a:ext cx="2841696" cy="1372148"/>
-          </a:xfrm>
-          <a:prstGeom prst="rect">
-            <a:avLst/>
-          </a:prstGeom>
-          <a:noFill/>
-          <a:ln/>
-        </p:spPr>
-        <p:txBody>
-          <a:bodyPr wrap="square" lIns="0" tIns="0" rIns="0" bIns="0" rtlCol="0" anchor="t"/>
-          <a:lstStyle/>
-          <a:p>
-            <a:pPr algn="l" indent="0" marL="0">
-              <a:lnSpc>
-                <a:spcPts val="2160"/>
-              </a:lnSpc>
-              <a:buNone/>
-            </a:pPr>
-            <a:r>
-              <a:rPr lang="en-US" sz="1440" dirty="0">
-                <a:solidFill>
-                  <a:srgbClr val="626262"/>
-                </a:solidFill>
-                <a:latin typeface="Inter" pitchFamily="34" charset="0"/>
-                <a:ea typeface="Inter" pitchFamily="34" charset="-122"/>
-                <a:cs typeface="Inter" pitchFamily="34" charset="-120"/>
-              </a:rPr>
-              <a:t>Built on Foundry, Bedrock, Google or in-house orchestration, reaching into business systems through tools, replaced in weeks.</a:t>
-            </a:r>
-            <a:endParaRPr lang="en-US" sz="1440" dirty="0"/>
-          </a:p>
-        </p:txBody>
-      </p:sp>
-      <p:sp>
-        <p:nvSpPr>
-          <p:cNvPr id="9" name="Text 6"/>
-          <p:cNvSpPr/>
-          <p:nvPr/>
-        </p:nvSpPr>
-        <p:spPr>
-          <a:xfrm>
-            <a:off x="8270703" y="2885763"/>
-            <a:ext cx="2841696" cy="596614"/>
-          </a:xfrm>
-          <a:prstGeom prst="rect">
-            <a:avLst/>
-          </a:prstGeom>
-          <a:noFill/>
-          <a:ln/>
-        </p:spPr>
-        <p:txBody>
-          <a:bodyPr wrap="square" lIns="0" tIns="0" rIns="0" bIns="0" rtlCol="0" anchor="t"/>
-          <a:lstStyle/>
-          <a:p>
-            <a:pPr algn="l" indent="0" marL="0">
-              <a:lnSpc>
-                <a:spcPts val="2350"/>
-              </a:lnSpc>
-              <a:buNone/>
-            </a:pPr>
-            <a:r>
-              <a:rPr lang="en-US" sz="1570" b="1" dirty="0">
-                <a:solidFill>
-                  <a:srgbClr val="252525"/>
-                </a:solidFill>
-                <a:latin typeface="Inter" pitchFamily="34" charset="0"/>
-                <a:ea typeface="Inter" pitchFamily="34" charset="-122"/>
-                <a:cs typeface="Inter" pitchFamily="34" charset="-120"/>
-              </a:rPr>
-              <a:t>AI inside the tools already in use</a:t>
-            </a:r>
-            <a:endParaRPr lang="en-US" sz="1570" dirty="0"/>
-          </a:p>
-        </p:txBody>
-      </p:sp>
-      <p:sp>
-        <p:nvSpPr>
-          <p:cNvPr id="10" name="Text 7"/>
-          <p:cNvSpPr/>
-          <p:nvPr/>
-        </p:nvSpPr>
-        <p:spPr>
-          <a:xfrm>
-            <a:off x="8270703" y="3551884"/>
-            <a:ext cx="2841696" cy="1646577"/>
-          </a:xfrm>
-          <a:prstGeom prst="rect">
-            <a:avLst/>
-          </a:prstGeom>
-          <a:noFill/>
-          <a:ln/>
-        </p:spPr>
-        <p:txBody>
-          <a:bodyPr wrap="square" lIns="0" tIns="0" rIns="0" bIns="0" rtlCol="0" anchor="t"/>
-          <a:lstStyle/>
-          <a:p>
-            <a:pPr algn="l" indent="0" marL="0">
-              <a:lnSpc>
-                <a:spcPts val="2160"/>
-              </a:lnSpc>
-              <a:buNone/>
-            </a:pPr>
-            <a:r>
-              <a:rPr lang="en-US" sz="1440" dirty="0">
-                <a:solidFill>
-                  <a:srgbClr val="626262"/>
-                </a:solidFill>
-                <a:latin typeface="Inter" pitchFamily="34" charset="0"/>
-                <a:ea typeface="Inter" pitchFamily="34" charset="-122"/>
-                <a:cs typeface="Inter" pitchFamily="34" charset="-120"/>
-              </a:rPr>
-              <a:t>Copilots in productivity suites, assistants inside SaaS, GenAI in the delivery pipeline. Adopted faster than any review cycle, often without anyone registering them.</a:t>
-            </a:r>
-            <a:endParaRPr lang="en-US" sz="1440" dirty="0"/>
-          </a:p>
-        </p:txBody>
-      </p:sp>
-      <p:sp>
-        <p:nvSpPr>
-          <p:cNvPr id="11" name="Text 8"/>
-          <p:cNvSpPr/>
-          <p:nvPr/>
-        </p:nvSpPr>
-        <p:spPr>
-          <a:xfrm>
-            <a:off x="830521" y="5748956"/>
-            <a:ext cx="10530958" cy="247445"/>
-          </a:xfrm>
-          <a:prstGeom prst="rect">
-            <a:avLst/>
-          </a:prstGeom>
-          <a:noFill/>
-          <a:ln/>
-        </p:spPr>
-        <p:txBody>
-          <a:bodyPr wrap="square" lIns="0" tIns="0" rIns="0" bIns="0" rtlCol="0" anchor="t"/>
-          <a:lstStyle/>
-          <a:p>
-            <a:pPr algn="l" indent="0" marL="0">
-              <a:lnSpc>
-                <a:spcPts val="1950"/>
-              </a:lnSpc>
-              <a:buNone/>
-            </a:pPr>
-            <a:r>
-              <a:rPr lang="en-US" sz="1300" dirty="0">
-                <a:solidFill>
-                  <a:srgbClr val="626262"/>
-                </a:solidFill>
-                <a:latin typeface="Inter" pitchFamily="34" charset="0"/>
-                <a:ea typeface="Inter" pitchFamily="34" charset="-122"/>
-                <a:cs typeface="Inter" pitchFamily="34" charset="-120"/>
-              </a:rPr>
-              <a:t>AI estate in organisations changes weekly. Governance designed around a quarterly model review meets a fleet it cannot see.</a:t>
-            </a:r>
-            <a:endParaRPr lang="en-US" sz="1300" dirty="0"/>
+      <p:pic>
+        <p:nvPicPr>
+          <p:cNvPr id="3" name="Image 1" descr="preencoded.png">    </p:cNvPr>
+          <p:cNvPicPr>
+            <a:picLocks noChangeAspect="1"/>
+          </p:cNvPicPr>
+          <p:nvPr/>
+        </p:nvPicPr>
+        <p:blipFill>
+          <a:blip r:embed="rId2"/>
+          <a:stretch>
+            <a:fillRect/>
+          </a:stretch>
+        </p:blipFill>
+        <p:spPr>
+          <a:xfrm>
+            <a:off x="11247215" y="335280"/>
+            <a:ext cx="609600" cy="609600"/>
+          </a:xfrm>
+          <a:prstGeom prst="rect">
+            <a:avLst/>
+          </a:prstGeom>
+        </p:spPr>
+      </p:pic>
+      <p:sp>
+        <p:nvSpPr>
+          <p:cNvPr id="4" name="Text 0"/>
+          <p:cNvSpPr/>
+          <p:nvPr/>
+        </p:nvSpPr>
+        <p:spPr>
+          <a:xfrm>
+            <a:off x="830520" y="2801243"/>
+            <a:ext cx="10530959" cy="645914"/>
+          </a:xfrm>
+          <a:prstGeom prst="rect">
+            <a:avLst/>
+          </a:prstGeom>
+          <a:noFill/>
+          <a:ln/>
+        </p:spPr>
+        <p:txBody>
+          <a:bodyPr wrap="square" lIns="0" tIns="0" rIns="0" bIns="0" rtlCol="0" anchor="t"/>
+          <a:lstStyle/>
+          <a:p>
+            <a:pPr algn="l" indent="0" marL="0">
+              <a:lnSpc>
+                <a:spcPts val="5090"/>
+              </a:lnSpc>
+              <a:buNone/>
+            </a:pPr>
+            <a:r>
+              <a:rPr lang="en-US" sz="4850" dirty="0">
+                <a:solidFill>
+                  <a:srgbClr val="111318"/>
+                </a:solidFill>
+                <a:latin typeface="Libre Franklin" pitchFamily="34" charset="0"/>
+                <a:ea typeface="Libre Franklin" pitchFamily="34" charset="-122"/>
+                <a:cs typeface="Libre Franklin" pitchFamily="34" charset="-120"/>
+              </a:rPr>
+              <a:t>Governance &amp; runtime enforcement</a:t>
+            </a:r>
+            <a:endParaRPr lang="en-US" sz="4850" dirty="0"/>
+          </a:p>
+        </p:txBody>
+      </p:sp>
+      <p:sp>
+        <p:nvSpPr>
+          <p:cNvPr id="5" name="Text 1"/>
+          <p:cNvSpPr/>
+          <p:nvPr/>
+        </p:nvSpPr>
+        <p:spPr>
+          <a:xfrm>
+            <a:off x="830520" y="3687366"/>
+            <a:ext cx="10530959" cy="225177"/>
+          </a:xfrm>
+          <a:prstGeom prst="rect">
+            <a:avLst/>
+          </a:prstGeom>
+          <a:noFill/>
+          <a:ln/>
+        </p:spPr>
+        <p:txBody>
+          <a:bodyPr wrap="square" lIns="0" tIns="0" rIns="0" bIns="0" rtlCol="0" anchor="t"/>
+          <a:lstStyle/>
+          <a:p>
+            <a:pPr algn="l" indent="0" marL="0">
+              <a:lnSpc>
+                <a:spcPts val="1770"/>
+              </a:lnSpc>
+              <a:buNone/>
+            </a:pPr>
+            <a:r>
+              <a:rPr lang="en-US" sz="1180" dirty="0">
+                <a:solidFill>
+                  <a:srgbClr val="111318"/>
+                </a:solidFill>
+                <a:latin typeface="Libre Franklin" pitchFamily="34" charset="0"/>
+                <a:ea typeface="Libre Franklin" pitchFamily="34" charset="-122"/>
+                <a:cs typeface="Libre Franklin" pitchFamily="34" charset="-120"/>
+              </a:rPr>
+              <a:t>Separate layers, and the record that joins them</a:t>
+            </a:r>
+            <a:endParaRPr lang="en-US" sz="1180" dirty="0"/>
+          </a:p>
+        </p:txBody>
+      </p:sp>
+      <p:sp>
+        <p:nvSpPr>
+          <p:cNvPr id="6" name="Text 2"/>
+          <p:cNvSpPr/>
+          <p:nvPr/>
+        </p:nvSpPr>
+        <p:spPr>
+          <a:xfrm>
+            <a:off x="830520" y="4152751"/>
+            <a:ext cx="10530959" cy="450354"/>
+          </a:xfrm>
+          <a:prstGeom prst="rect">
+            <a:avLst/>
+          </a:prstGeom>
+          <a:noFill/>
+          <a:ln/>
+        </p:spPr>
+        <p:txBody>
+          <a:bodyPr wrap="square" lIns="0" tIns="0" rIns="0" bIns="0" rtlCol="0" anchor="t"/>
+          <a:lstStyle/>
+          <a:p>
+            <a:pPr algn="l" indent="0" marL="0">
+              <a:lnSpc>
+                <a:spcPts val="1770"/>
+              </a:lnSpc>
+              <a:buNone/>
+            </a:pPr>
+            <a:r>
+              <a:rPr lang="en-US" sz="1180" dirty="0">
+                <a:solidFill>
+                  <a:srgbClr val="111318"/>
+                </a:solidFill>
+                <a:latin typeface="Libre Franklin" pitchFamily="34" charset="0"/>
+                <a:ea typeface="Libre Franklin" pitchFamily="34" charset="-122"/>
+                <a:cs typeface="Libre Franklin" pitchFamily="34" charset="-120"/>
+              </a:rPr>
+              <a:t>The record is the register itself: every system with its tier, the controls that apply to it,</a:t>
+            </a:r>
+            <a:pPr algn="l" indent="0" marL="0">
+              <a:lnSpc>
+                <a:spcPts val="1770"/>
+              </a:lnSpc>
+              <a:buNone/>
+            </a:pPr>
+            <a:r>
+              <a:rPr lang="en-US" sz="1180" dirty="0">
+                <a:solidFill>
+                  <a:srgbClr val="111318"/>
+                </a:solidFill>
+                <a:latin typeface="Libre Franklin" pitchFamily="34" charset="0"/>
+                <a:ea typeface="Libre Franklin" pitchFamily="34" charset="-122"/>
+                <a:cs typeface="Libre Franklin" pitchFamily="34" charset="-120"/>
+              </a:rPr>
+              <a:t> the evidence behind each one, and the log of who changed what.</a:t>
+            </a:r>
+            <a:endParaRPr lang="en-US" sz="1180" dirty="0"/>
+          </a:p>
+        </p:txBody>
+      </p:sp>
+      <p:sp>
+        <p:nvSpPr>
+          <p:cNvPr id="7" name="Text 3"/>
+          <p:cNvSpPr/>
+          <p:nvPr/>
+        </p:nvSpPr>
+        <p:spPr>
+          <a:xfrm>
+            <a:off x="830520" y="4702522"/>
+            <a:ext cx="10530959" cy="814388"/>
+          </a:xfrm>
+          <a:prstGeom prst="rect">
+            <a:avLst/>
+          </a:prstGeom>
+          <a:noFill/>
+          <a:ln/>
+        </p:spPr>
+        <p:txBody>
+          <a:bodyPr wrap="square" lIns="0" tIns="0" rIns="0" bIns="0" rtlCol="0" anchor="t"/>
+          <a:lstStyle/>
+          <a:p>
+            <a:pPr algn="l" indent="0" marL="0">
+              <a:lnSpc>
+                <a:spcPts val="2140"/>
+              </a:lnSpc>
+              <a:buNone/>
+            </a:pPr>
+            <a:r>
+              <a:rPr lang="en-US" sz="1430" dirty="0">
+                <a:solidFill>
+                  <a:srgbClr val="111318"/>
+                </a:solidFill>
+                <a:latin typeface="Libre Franklin" pitchFamily="34" charset="0"/>
+                <a:ea typeface="Libre Franklin" pitchFamily="34" charset="-122"/>
+                <a:cs typeface="Libre Franklin" pitchFamily="34" charset="-120"/>
+              </a:rPr>
+              <a:t> CTO Mikko Kämäräinen</a:t>
+            </a:r>
+            <a:pPr algn="l" indent="0" marL="0">
+              <a:lnSpc>
+                <a:spcPts val="2140"/>
+              </a:lnSpc>
+              <a:buNone/>
+            </a:pPr>
+            <a:r>
+              <a:rPr lang="en-US" sz="1430" b="1" dirty="0">
+                <a:solidFill>
+                  <a:srgbClr val="111318"/>
+                </a:solidFill>
+                <a:latin typeface="Libre Franklin" pitchFamily="34" charset="0"/>
+                <a:ea typeface="Libre Franklin" pitchFamily="34" charset="-122"/>
+                <a:cs typeface="Libre Franklin" pitchFamily="34" charset="-120"/>
+              </a:rPr>
+              <a:t>Saidot</a:t>
+            </a:r>
+            <a:endParaRPr lang="en-US" sz="1430" dirty="0"/>
           </a:p>
         </p:txBody>
       </p:sp>
@@ -1757,212 +1783,505 @@
         <p:spPr>
           <a:xfrm>
             <a:off x="0" y="0"/>
-            <a:ext cx="12192000" cy="6857959"/>
+            <a:ext cx="12192000" cy="6858000"/>
           </a:xfrm>
           <a:prstGeom prst="rect">
             <a:avLst/>
           </a:prstGeom>
         </p:spPr>
       </p:pic>
-      <p:sp>
-        <p:nvSpPr>
-          <p:cNvPr id="3" name="Text 0"/>
-          <p:cNvSpPr/>
-          <p:nvPr/>
-        </p:nvSpPr>
-        <p:spPr>
-          <a:xfrm>
-            <a:off x="830521" y="219151"/>
-            <a:ext cx="2548622" cy="1380652"/>
-          </a:xfrm>
-          <a:prstGeom prst="rect">
-            <a:avLst/>
-          </a:prstGeom>
-          <a:noFill/>
-          <a:ln/>
-        </p:spPr>
-        <p:txBody>
-          <a:bodyPr wrap="square" lIns="0" tIns="0" rIns="0" bIns="0" rtlCol="0" anchor="t"/>
-          <a:lstStyle/>
-          <a:p>
-            <a:pPr algn="l" indent="0" marL="0">
-              <a:lnSpc>
-                <a:spcPts val="3620"/>
-              </a:lnSpc>
-              <a:buNone/>
-            </a:pPr>
-            <a:r>
-              <a:rPr lang="en-US" sz="3240" dirty="0">
-                <a:solidFill>
-                  <a:srgbClr val="252525"/>
-                </a:solidFill>
-                <a:latin typeface="Copyright Peregrin Studio" pitchFamily="34" charset="0"/>
-                <a:ea typeface="Copyright Peregrin Studio" pitchFamily="34" charset="-122"/>
-                <a:cs typeface="Copyright Peregrin Studio" pitchFamily="34" charset="-120"/>
-              </a:rPr>
-              <a:t>A control plane governs what it runs</a:t>
-            </a:r>
-            <a:endParaRPr lang="en-US" sz="3240" dirty="0"/>
-          </a:p>
-        </p:txBody>
-      </p:sp>
-      <p:sp>
-        <p:nvSpPr>
-          <p:cNvPr id="4" name="Text 1"/>
-          <p:cNvSpPr/>
-          <p:nvPr/>
-        </p:nvSpPr>
-        <p:spPr>
-          <a:xfrm>
-            <a:off x="830521" y="1719028"/>
-            <a:ext cx="2548622" cy="1237223"/>
-          </a:xfrm>
-          <a:prstGeom prst="rect">
-            <a:avLst/>
-          </a:prstGeom>
-          <a:noFill/>
-          <a:ln/>
-        </p:spPr>
-        <p:txBody>
-          <a:bodyPr wrap="square" lIns="0" tIns="0" rIns="0" bIns="0" rtlCol="0" anchor="t"/>
-          <a:lstStyle/>
-          <a:p>
-            <a:pPr algn="l" indent="0" marL="0">
-              <a:lnSpc>
-                <a:spcPts val="1950"/>
-              </a:lnSpc>
-              <a:buNone/>
-            </a:pPr>
-            <a:r>
-              <a:rPr lang="en-US" sz="1300" dirty="0">
-                <a:solidFill>
-                  <a:srgbClr val="252525"/>
-                </a:solidFill>
-                <a:latin typeface="Inter" pitchFamily="34" charset="0"/>
-                <a:ea typeface="Inter" pitchFamily="34" charset="-122"/>
-                <a:cs typeface="Inter" pitchFamily="34" charset="-120"/>
-              </a:rPr>
-              <a:t>Each runtime enforces at its own boundary: tool calls, approval gates, content filters. That enforcement is real, and it </a:t>
-            </a:r>
-            <a:pPr algn="l" indent="0" marL="0">
-              <a:lnSpc>
-                <a:spcPts val="1950"/>
-              </a:lnSpc>
-              <a:buNone/>
-            </a:pPr>
-            <a:r>
-              <a:rPr lang="en-US" sz="1300" b="1" dirty="0">
-                <a:solidFill>
-                  <a:srgbClr val="252525"/>
-                </a:solidFill>
-                <a:latin typeface="Inter" pitchFamily="34" charset="0"/>
-                <a:ea typeface="Inter" pitchFamily="34" charset="-122"/>
-                <a:cs typeface="Inter" pitchFamily="34" charset="-120"/>
-              </a:rPr>
-              <a:t>stops at the platform edge</a:t>
-            </a:r>
-            <a:pPr algn="l" indent="0" marL="0">
-              <a:lnSpc>
-                <a:spcPts val="1950"/>
-              </a:lnSpc>
-              <a:buNone/>
-            </a:pPr>
-            <a:r>
-              <a:rPr lang="en-US" sz="1300" dirty="0">
-                <a:solidFill>
-                  <a:srgbClr val="252525"/>
-                </a:solidFill>
-                <a:latin typeface="Inter" pitchFamily="34" charset="0"/>
-                <a:ea typeface="Inter" pitchFamily="34" charset="-122"/>
-                <a:cs typeface="Inter" pitchFamily="34" charset="-120"/>
-              </a:rPr>
-              <a:t>.</a:t>
-            </a:r>
-            <a:endParaRPr lang="en-US" sz="1300" dirty="0"/>
-          </a:p>
-        </p:txBody>
-      </p:sp>
-      <p:sp>
-        <p:nvSpPr>
-          <p:cNvPr id="5" name="Text 2"/>
-          <p:cNvSpPr/>
-          <p:nvPr/>
-        </p:nvSpPr>
-        <p:spPr>
-          <a:xfrm>
-            <a:off x="830521" y="3065499"/>
-            <a:ext cx="2548622" cy="1979556"/>
-          </a:xfrm>
-          <a:prstGeom prst="rect">
-            <a:avLst/>
-          </a:prstGeom>
-          <a:noFill/>
-          <a:ln/>
-        </p:spPr>
-        <p:txBody>
-          <a:bodyPr wrap="square" lIns="0" tIns="0" rIns="0" bIns="0" rtlCol="0" anchor="t"/>
-          <a:lstStyle/>
-          <a:p>
-            <a:pPr algn="l" indent="0" marL="0">
-              <a:lnSpc>
-                <a:spcPts val="1950"/>
-              </a:lnSpc>
-              <a:buNone/>
-            </a:pPr>
-            <a:r>
-              <a:rPr lang="en-US" sz="1300" dirty="0">
-                <a:solidFill>
-                  <a:srgbClr val="252525"/>
-                </a:solidFill>
-                <a:latin typeface="Inter" pitchFamily="34" charset="0"/>
-                <a:ea typeface="Inter" pitchFamily="34" charset="-122"/>
-                <a:cs typeface="Inter" pitchFamily="34" charset="-120"/>
-              </a:rPr>
-              <a:t>The platform knows who runs a workflow and who approved a change. It does not carry the system's purpose, its risk tier or the person answerable for it. Risk is contextual, so the tier is decided where the use case is, not where the code runs.</a:t>
-            </a:r>
-            <a:endParaRPr lang="en-US" sz="1300" dirty="0"/>
-          </a:p>
-        </p:txBody>
-      </p:sp>
-      <p:sp>
-        <p:nvSpPr>
-          <p:cNvPr id="6" name="Text 3"/>
-          <p:cNvSpPr/>
-          <p:nvPr/>
-        </p:nvSpPr>
-        <p:spPr>
-          <a:xfrm>
-            <a:off x="830521" y="5154304"/>
-            <a:ext cx="2548622" cy="1484667"/>
-          </a:xfrm>
-          <a:prstGeom prst="rect">
-            <a:avLst/>
-          </a:prstGeom>
-          <a:noFill/>
-          <a:ln/>
-        </p:spPr>
-        <p:txBody>
-          <a:bodyPr wrap="square" lIns="0" tIns="0" rIns="0" bIns="0" rtlCol="0" anchor="t"/>
-          <a:lstStyle/>
-          <a:p>
-            <a:pPr algn="l" indent="0" marL="0">
-              <a:lnSpc>
-                <a:spcPts val="1950"/>
-              </a:lnSpc>
-              <a:buNone/>
-            </a:pPr>
-            <a:r>
-              <a:rPr lang="en-US" sz="1300" dirty="0">
-                <a:solidFill>
-                  <a:srgbClr val="252525"/>
-                </a:solidFill>
-                <a:latin typeface="Inter" pitchFamily="34" charset="0"/>
-                <a:ea typeface="Inter" pitchFamily="34" charset="-122"/>
-                <a:cs typeface="Inter" pitchFamily="34" charset="-120"/>
-              </a:rPr>
-              <a:t>An agent arriving over an open interface brings its own model, data, tools and purpose. The host enforces at the tool boundary. Governance has to see all the systems.</a:t>
-            </a:r>
-            <a:endParaRPr lang="en-US" sz="1300" dirty="0"/>
+      <p:pic>
+        <p:nvPicPr>
+          <p:cNvPr id="3" name="Image 1" descr="preencoded.png">    </p:cNvPr>
+          <p:cNvPicPr>
+            <a:picLocks noChangeAspect="1"/>
+          </p:cNvPicPr>
+          <p:nvPr/>
+        </p:nvPicPr>
+        <p:blipFill>
+          <a:blip r:embed="rId2"/>
+          <a:stretch>
+            <a:fillRect/>
+          </a:stretch>
+        </p:blipFill>
+        <p:spPr>
+          <a:xfrm>
+            <a:off x="10942415" y="6363421"/>
+            <a:ext cx="914400" cy="234892"/>
+          </a:xfrm>
+          <a:prstGeom prst="rect">
+            <a:avLst/>
+          </a:prstGeom>
+        </p:spPr>
+      </p:pic>
+      <p:sp>
+        <p:nvSpPr>
+          <p:cNvPr id="4" name="Text 0"/>
+          <p:cNvSpPr/>
+          <p:nvPr/>
+        </p:nvSpPr>
+        <p:spPr>
+          <a:xfrm>
+            <a:off x="830520" y="1232743"/>
+            <a:ext cx="10530959" cy="225177"/>
+          </a:xfrm>
+          <a:prstGeom prst="rect">
+            <a:avLst/>
+          </a:prstGeom>
+          <a:noFill/>
+          <a:ln/>
+        </p:spPr>
+        <p:txBody>
+          <a:bodyPr wrap="square" lIns="0" tIns="0" rIns="0" bIns="0" rtlCol="0" anchor="t"/>
+          <a:lstStyle/>
+          <a:p>
+            <a:pPr algn="l" indent="0" marL="0">
+              <a:lnSpc>
+                <a:spcPts val="1770"/>
+              </a:lnSpc>
+              <a:buNone/>
+            </a:pPr>
+            <a:r>
+              <a:rPr lang="en-US" sz="1180" b="1" dirty="0">
+                <a:solidFill>
+                  <a:srgbClr val="FFFFFF"/>
+                </a:solidFill>
+                <a:latin typeface="Libre Franklin" pitchFamily="34" charset="0"/>
+                <a:ea typeface="Libre Franklin" pitchFamily="34" charset="-122"/>
+                <a:cs typeface="Libre Franklin" pitchFamily="34" charset="-120"/>
+              </a:rPr>
+              <a:t>Governance and enforcement</a:t>
+            </a:r>
+            <a:endParaRPr lang="en-US" sz="1180" dirty="0"/>
+          </a:p>
+        </p:txBody>
+      </p:sp>
+      <p:sp>
+        <p:nvSpPr>
+          <p:cNvPr id="5" name="Text 1"/>
+          <p:cNvSpPr/>
+          <p:nvPr/>
+        </p:nvSpPr>
+        <p:spPr>
+          <a:xfrm>
+            <a:off x="830520" y="1732211"/>
+            <a:ext cx="10530959" cy="495598"/>
+          </a:xfrm>
+          <a:prstGeom prst="rect">
+            <a:avLst/>
+          </a:prstGeom>
+          <a:noFill/>
+          <a:ln/>
+        </p:spPr>
+        <p:txBody>
+          <a:bodyPr wrap="square" lIns="0" tIns="0" rIns="0" bIns="0" rtlCol="0" anchor="t"/>
+          <a:lstStyle/>
+          <a:p>
+            <a:pPr algn="l" indent="0" marL="0">
+              <a:lnSpc>
+                <a:spcPts val="3900"/>
+              </a:lnSpc>
+              <a:buNone/>
+            </a:pPr>
+            <a:r>
+              <a:rPr lang="en-US" sz="3550" dirty="0">
+                <a:solidFill>
+                  <a:srgbClr val="FFFFFF"/>
+                </a:solidFill>
+                <a:latin typeface="Libre Franklin" pitchFamily="34" charset="0"/>
+                <a:ea typeface="Libre Franklin" pitchFamily="34" charset="-122"/>
+                <a:cs typeface="Libre Franklin" pitchFamily="34" charset="-120"/>
+              </a:rPr>
+              <a:t>The systems being governed are in flux</a:t>
+            </a:r>
+            <a:endParaRPr lang="en-US" sz="3550" dirty="0"/>
+          </a:p>
+        </p:txBody>
+      </p:sp>
+      <p:sp>
+        <p:nvSpPr>
+          <p:cNvPr id="6" name="Text 2"/>
+          <p:cNvSpPr/>
+          <p:nvPr/>
+        </p:nvSpPr>
+        <p:spPr>
+          <a:xfrm>
+            <a:off x="1057186" y="3065859"/>
+            <a:ext cx="2904559" cy="271463"/>
+          </a:xfrm>
+          <a:prstGeom prst="rect">
+            <a:avLst/>
+          </a:prstGeom>
+          <a:noFill/>
+          <a:ln/>
+        </p:spPr>
+        <p:txBody>
+          <a:bodyPr wrap="square" lIns="0" tIns="0" rIns="0" bIns="0" rtlCol="0" anchor="t"/>
+          <a:lstStyle/>
+          <a:p>
+            <a:pPr algn="l" indent="0" marL="0">
+              <a:lnSpc>
+                <a:spcPts val="2140"/>
+              </a:lnSpc>
+              <a:buNone/>
+            </a:pPr>
+            <a:r>
+              <a:rPr lang="en-US" sz="1430" b="1" dirty="0">
+                <a:solidFill>
+                  <a:srgbClr val="FFFFFF"/>
+                </a:solidFill>
+                <a:latin typeface="Libre Franklin" pitchFamily="34" charset="0"/>
+                <a:ea typeface="Libre Franklin" pitchFamily="34" charset="-122"/>
+                <a:cs typeface="Libre Franklin" pitchFamily="34" charset="-120"/>
+              </a:rPr>
+              <a:t>Models</a:t>
+            </a:r>
+            <a:endParaRPr lang="en-US" sz="1430" dirty="0"/>
+          </a:p>
+        </p:txBody>
+      </p:sp>
+      <p:sp>
+        <p:nvSpPr>
+          <p:cNvPr id="7" name="Text 3"/>
+          <p:cNvSpPr/>
+          <p:nvPr/>
+        </p:nvSpPr>
+        <p:spPr>
+          <a:xfrm>
+            <a:off x="1057186" y="3400574"/>
+            <a:ext cx="2904559" cy="998934"/>
+          </a:xfrm>
+          <a:prstGeom prst="rect">
+            <a:avLst/>
+          </a:prstGeom>
+          <a:noFill/>
+          <a:ln/>
+        </p:spPr>
+        <p:txBody>
+          <a:bodyPr wrap="square" lIns="0" tIns="0" rIns="0" bIns="0" rtlCol="0" anchor="t"/>
+          <a:lstStyle/>
+          <a:p>
+            <a:pPr algn="l" indent="0" marL="0">
+              <a:lnSpc>
+                <a:spcPts val="1970"/>
+              </a:lnSpc>
+              <a:buNone/>
+            </a:pPr>
+            <a:r>
+              <a:rPr lang="en-US" sz="1310" dirty="0">
+                <a:solidFill>
+                  <a:srgbClr val="BCBDBE"/>
+                </a:solidFill>
+                <a:latin typeface="Libre Franklin" pitchFamily="34" charset="0"/>
+                <a:ea typeface="Libre Franklin" pitchFamily="34" charset="-122"/>
+                <a:cs typeface="Libre Franklin" pitchFamily="34" charset="-120"/>
+              </a:rPr>
+              <a:t>Swapped for a newer version, a cheaper provider or a fine-tune, and every system built on the old one inherits the change.</a:t>
+            </a:r>
+            <a:endParaRPr lang="en-US" sz="1310" dirty="0"/>
+          </a:p>
+        </p:txBody>
+      </p:sp>
+      <p:sp>
+        <p:nvSpPr>
+          <p:cNvPr id="8" name="Text 4"/>
+          <p:cNvSpPr/>
+          <p:nvPr/>
+        </p:nvSpPr>
+        <p:spPr>
+          <a:xfrm>
+            <a:off x="4643646" y="3065859"/>
+            <a:ext cx="2904708" cy="271463"/>
+          </a:xfrm>
+          <a:prstGeom prst="rect">
+            <a:avLst/>
+          </a:prstGeom>
+          <a:noFill/>
+          <a:ln/>
+        </p:spPr>
+        <p:txBody>
+          <a:bodyPr wrap="square" lIns="0" tIns="0" rIns="0" bIns="0" rtlCol="0" anchor="t"/>
+          <a:lstStyle/>
+          <a:p>
+            <a:pPr algn="l" indent="0" marL="0">
+              <a:lnSpc>
+                <a:spcPts val="2140"/>
+              </a:lnSpc>
+              <a:buNone/>
+            </a:pPr>
+            <a:r>
+              <a:rPr lang="en-US" sz="1430" b="1" dirty="0">
+                <a:solidFill>
+                  <a:srgbClr val="FFFFFF"/>
+                </a:solidFill>
+                <a:latin typeface="Libre Franklin" pitchFamily="34" charset="0"/>
+                <a:ea typeface="Libre Franklin" pitchFamily="34" charset="-122"/>
+                <a:cs typeface="Libre Franklin" pitchFamily="34" charset="-120"/>
+              </a:rPr>
+              <a:t>Platforms, systems &amp; agents</a:t>
+            </a:r>
+            <a:endParaRPr lang="en-US" sz="1430" dirty="0"/>
+          </a:p>
+        </p:txBody>
+      </p:sp>
+      <p:sp>
+        <p:nvSpPr>
+          <p:cNvPr id="9" name="Text 5"/>
+          <p:cNvSpPr/>
+          <p:nvPr/>
+        </p:nvSpPr>
+        <p:spPr>
+          <a:xfrm>
+            <a:off x="4643646" y="3400574"/>
+            <a:ext cx="2904708" cy="998934"/>
+          </a:xfrm>
+          <a:prstGeom prst="rect">
+            <a:avLst/>
+          </a:prstGeom>
+          <a:noFill/>
+          <a:ln/>
+        </p:spPr>
+        <p:txBody>
+          <a:bodyPr wrap="square" lIns="0" tIns="0" rIns="0" bIns="0" rtlCol="0" anchor="t"/>
+          <a:lstStyle/>
+          <a:p>
+            <a:pPr algn="l" indent="0" marL="0">
+              <a:lnSpc>
+                <a:spcPts val="1970"/>
+              </a:lnSpc>
+              <a:buNone/>
+            </a:pPr>
+            <a:r>
+              <a:rPr lang="en-US" sz="1310" dirty="0">
+                <a:solidFill>
+                  <a:srgbClr val="BCBDBE"/>
+                </a:solidFill>
+                <a:latin typeface="Libre Franklin" pitchFamily="34" charset="0"/>
+                <a:ea typeface="Libre Franklin" pitchFamily="34" charset="-122"/>
+                <a:cs typeface="Libre Franklin" pitchFamily="34" charset="-120"/>
+              </a:rPr>
+              <a:t>Built on Foundry, Bedrock, Google or in-house orchestration, acting on business systems through tools, replaced in weeks.</a:t>
+            </a:r>
+            <a:endParaRPr lang="en-US" sz="1310" dirty="0"/>
+          </a:p>
+        </p:txBody>
+      </p:sp>
+      <p:sp>
+        <p:nvSpPr>
+          <p:cNvPr id="10" name="Text 6"/>
+          <p:cNvSpPr/>
+          <p:nvPr/>
+        </p:nvSpPr>
+        <p:spPr>
+          <a:xfrm>
+            <a:off x="8230255" y="3065859"/>
+            <a:ext cx="2904559" cy="271463"/>
+          </a:xfrm>
+          <a:prstGeom prst="rect">
+            <a:avLst/>
+          </a:prstGeom>
+          <a:noFill/>
+          <a:ln/>
+        </p:spPr>
+        <p:txBody>
+          <a:bodyPr wrap="square" lIns="0" tIns="0" rIns="0" bIns="0" rtlCol="0" anchor="t"/>
+          <a:lstStyle/>
+          <a:p>
+            <a:pPr algn="l" indent="0" marL="0">
+              <a:lnSpc>
+                <a:spcPts val="2140"/>
+              </a:lnSpc>
+              <a:buNone/>
+            </a:pPr>
+            <a:r>
+              <a:rPr lang="en-US" sz="1430" b="1" dirty="0">
+                <a:solidFill>
+                  <a:srgbClr val="FFFFFF"/>
+                </a:solidFill>
+                <a:latin typeface="Libre Franklin" pitchFamily="34" charset="0"/>
+                <a:ea typeface="Libre Franklin" pitchFamily="34" charset="-122"/>
+                <a:cs typeface="Libre Franklin" pitchFamily="34" charset="-120"/>
+              </a:rPr>
+              <a:t>AI inside the tools already in use</a:t>
+            </a:r>
+            <a:endParaRPr lang="en-US" sz="1430" dirty="0"/>
+          </a:p>
+        </p:txBody>
+      </p:sp>
+      <p:sp>
+        <p:nvSpPr>
+          <p:cNvPr id="11" name="Text 7"/>
+          <p:cNvSpPr/>
+          <p:nvPr/>
+        </p:nvSpPr>
+        <p:spPr>
+          <a:xfrm>
+            <a:off x="8230255" y="3400574"/>
+            <a:ext cx="2904559" cy="1498402"/>
+          </a:xfrm>
+          <a:prstGeom prst="rect">
+            <a:avLst/>
+          </a:prstGeom>
+          <a:noFill/>
+          <a:ln/>
+        </p:spPr>
+        <p:txBody>
+          <a:bodyPr wrap="square" lIns="0" tIns="0" rIns="0" bIns="0" rtlCol="0" anchor="t"/>
+          <a:lstStyle/>
+          <a:p>
+            <a:pPr algn="l" indent="0" marL="0">
+              <a:lnSpc>
+                <a:spcPts val="1970"/>
+              </a:lnSpc>
+              <a:buNone/>
+            </a:pPr>
+            <a:r>
+              <a:rPr lang="en-US" sz="1310" dirty="0">
+                <a:solidFill>
+                  <a:srgbClr val="BCBDBE"/>
+                </a:solidFill>
+                <a:latin typeface="Libre Franklin" pitchFamily="34" charset="0"/>
+                <a:ea typeface="Libre Franklin" pitchFamily="34" charset="-122"/>
+                <a:cs typeface="Libre Franklin" pitchFamily="34" charset="-120"/>
+              </a:rPr>
+              <a:t>Copilots in productivity suites, assistants inside SaaS, GenAI in the delivery pipeline.</a:t>
+            </a:r>
+            <a:pPr algn="l" indent="0" marL="0">
+              <a:lnSpc>
+                <a:spcPts val="1970"/>
+              </a:lnSpc>
+              <a:buNone/>
+            </a:pPr>
+            <a:r>
+              <a:rPr lang="en-US" sz="1310" dirty="0">
+                <a:solidFill>
+                  <a:srgbClr val="BCBDBE"/>
+                </a:solidFill>
+                <a:latin typeface="Libre Franklin" pitchFamily="34" charset="0"/>
+                <a:ea typeface="Libre Franklin" pitchFamily="34" charset="-122"/>
+                <a:cs typeface="Libre Franklin" pitchFamily="34" charset="-120"/>
+              </a:rPr>
+              <a:t> Adopted faster than any review cycle, often without anyone registering them.</a:t>
+            </a:r>
+            <a:endParaRPr lang="en-US" sz="1310" dirty="0"/>
+          </a:p>
+        </p:txBody>
+      </p:sp>
+      <p:sp>
+        <p:nvSpPr>
+          <p:cNvPr id="12" name="Text 8"/>
+          <p:cNvSpPr/>
+          <p:nvPr/>
+        </p:nvSpPr>
+        <p:spPr>
+          <a:xfrm>
+            <a:off x="830520" y="5399931"/>
+            <a:ext cx="10530959" cy="225177"/>
+          </a:xfrm>
+          <a:prstGeom prst="rect">
+            <a:avLst/>
+          </a:prstGeom>
+          <a:noFill/>
+          <a:ln/>
+        </p:spPr>
+        <p:txBody>
+          <a:bodyPr wrap="square" lIns="0" tIns="0" rIns="0" bIns="0" rtlCol="0" anchor="t"/>
+          <a:lstStyle/>
+          <a:p>
+            <a:pPr algn="l" indent="0" marL="0">
+              <a:lnSpc>
+                <a:spcPts val="1770"/>
+              </a:lnSpc>
+              <a:buNone/>
+            </a:pPr>
+            <a:r>
+              <a:rPr lang="en-US" sz="1180" i="1" dirty="0">
+                <a:solidFill>
+                  <a:srgbClr val="BCBDBE"/>
+                </a:solidFill>
+                <a:latin typeface="Libre Franklin" pitchFamily="34" charset="0"/>
+                <a:ea typeface="Libre Franklin" pitchFamily="34" charset="-122"/>
+                <a:cs typeface="Libre Franklin" pitchFamily="34" charset="-120"/>
+              </a:rPr>
+              <a:t>Three clouds, four agent platforms, a hundred systems? The </a:t>
+            </a:r>
+            <a:pPr algn="l" indent="0" marL="0">
+              <a:lnSpc>
+                <a:spcPts val="1770"/>
+              </a:lnSpc>
+              <a:buNone/>
+            </a:pPr>
+            <a:r>
+              <a:rPr lang="en-US" sz="1180" b="1" i="1" dirty="0">
+                <a:solidFill>
+                  <a:srgbClr val="BCBDBE"/>
+                </a:solidFill>
+                <a:latin typeface="Libre Franklin" pitchFamily="34" charset="0"/>
+                <a:ea typeface="Libre Franklin" pitchFamily="34" charset="-122"/>
+                <a:cs typeface="Libre Franklin" pitchFamily="34" charset="-120"/>
+              </a:rPr>
+              <a:t>decisions</a:t>
+            </a:r>
+            <a:pPr algn="l" indent="0" marL="0">
+              <a:lnSpc>
+                <a:spcPts val="1770"/>
+              </a:lnSpc>
+              <a:buNone/>
+            </a:pPr>
+            <a:r>
+              <a:rPr lang="en-US" sz="1180" i="1" dirty="0">
+                <a:solidFill>
+                  <a:srgbClr val="BCBDBE"/>
+                </a:solidFill>
+                <a:latin typeface="Libre Franklin" pitchFamily="34" charset="0"/>
+                <a:ea typeface="Libre Franklin" pitchFamily="34" charset="-122"/>
+                <a:cs typeface="Libre Franklin" pitchFamily="34" charset="-120"/>
+              </a:rPr>
+              <a:t> about them cannot live in a single runtime platform.</a:t>
+            </a:r>
+            <a:endParaRPr lang="en-US" sz="1180" dirty="0"/>
+          </a:p>
+        </p:txBody>
+      </p:sp>
+      <p:sp>
+        <p:nvSpPr>
+          <p:cNvPr id="13" name="Text 9"/>
+          <p:cNvSpPr/>
+          <p:nvPr/>
+        </p:nvSpPr>
+        <p:spPr>
+          <a:xfrm>
+            <a:off x="220920" y="6530429"/>
+            <a:ext cx="114627" cy="114300"/>
+          </a:xfrm>
+          <a:prstGeom prst="rect">
+            <a:avLst/>
+          </a:prstGeom>
+          <a:noFill/>
+          <a:ln/>
+        </p:spPr>
+        <p:txBody>
+          <a:bodyPr wrap="square" lIns="0" tIns="0" rIns="0" bIns="0" rtlCol="0" anchor="t"/>
+          <a:lstStyle/>
+          <a:p>
+            <a:pPr algn="l" indent="0" marL="0">
+              <a:lnSpc>
+                <a:spcPts val="900"/>
+              </a:lnSpc>
+              <a:buNone/>
+            </a:pPr>
+            <a:r>
+              <a:rPr lang="en-US" sz="900" dirty="0">
+                <a:solidFill>
+                  <a:srgbClr val="7C7D80"/>
+                </a:solidFill>
+                <a:latin typeface="SF Mono" pitchFamily="34" charset="0"/>
+                <a:ea typeface="SF Mono" pitchFamily="34" charset="-122"/>
+                <a:cs typeface="SF Mono" pitchFamily="34" charset="-120"/>
+              </a:rPr>
+              <a:t>2</a:t>
+            </a:r>
+            <a:endParaRPr lang="en-US" sz="900" dirty="0"/>
           </a:p>
         </p:txBody>
       </p:sp>
@@ -2008,212 +2327,320 @@
         <p:spPr>
           <a:xfrm>
             <a:off x="0" y="0"/>
-            <a:ext cx="12192000" cy="6857959"/>
+            <a:ext cx="12192000" cy="6858000"/>
           </a:xfrm>
           <a:prstGeom prst="rect">
             <a:avLst/>
           </a:prstGeom>
         </p:spPr>
       </p:pic>
-      <p:sp>
-        <p:nvSpPr>
-          <p:cNvPr id="3" name="Text 0"/>
-          <p:cNvSpPr/>
-          <p:nvPr/>
-        </p:nvSpPr>
-        <p:spPr>
-          <a:xfrm>
-            <a:off x="830521" y="943985"/>
-            <a:ext cx="2842350" cy="920435"/>
-          </a:xfrm>
-          <a:prstGeom prst="rect">
-            <a:avLst/>
-          </a:prstGeom>
-          <a:noFill/>
-          <a:ln/>
-        </p:spPr>
-        <p:txBody>
-          <a:bodyPr wrap="square" lIns="0" tIns="0" rIns="0" bIns="0" rtlCol="0" anchor="t"/>
-          <a:lstStyle/>
-          <a:p>
-            <a:pPr algn="l" indent="0" marL="0">
-              <a:lnSpc>
-                <a:spcPts val="3620"/>
-              </a:lnSpc>
-              <a:buNone/>
-            </a:pPr>
-            <a:r>
-              <a:rPr lang="en-US" sz="3240" dirty="0">
-                <a:solidFill>
-                  <a:srgbClr val="252525"/>
-                </a:solidFill>
-                <a:latin typeface="Copyright Peregrin Studio" pitchFamily="34" charset="0"/>
-                <a:ea typeface="Copyright Peregrin Studio" pitchFamily="34" charset="-122"/>
-                <a:cs typeface="Copyright Peregrin Studio" pitchFamily="34" charset="-120"/>
-              </a:rPr>
-              <a:t>Two layers, one loop</a:t>
-            </a:r>
-            <a:endParaRPr lang="en-US" sz="3240" dirty="0"/>
-          </a:p>
-        </p:txBody>
-      </p:sp>
-      <p:sp>
-        <p:nvSpPr>
-          <p:cNvPr id="4" name="Text 1"/>
-          <p:cNvSpPr/>
-          <p:nvPr/>
-        </p:nvSpPr>
-        <p:spPr>
-          <a:xfrm>
-            <a:off x="830521" y="1983645"/>
-            <a:ext cx="2842350" cy="1237223"/>
-          </a:xfrm>
-          <a:prstGeom prst="rect">
-            <a:avLst/>
-          </a:prstGeom>
-          <a:noFill/>
-          <a:ln/>
-        </p:spPr>
-        <p:txBody>
-          <a:bodyPr wrap="square" lIns="0" tIns="0" rIns="0" bIns="0" rtlCol="0" anchor="t"/>
-          <a:lstStyle/>
-          <a:p>
-            <a:pPr algn="l" indent="0" marL="0">
-              <a:lnSpc>
-                <a:spcPts val="1950"/>
-              </a:lnSpc>
-              <a:buNone/>
-            </a:pPr>
-            <a:r>
-              <a:rPr lang="en-US" sz="1300" dirty="0">
-                <a:solidFill>
-                  <a:srgbClr val="252525"/>
-                </a:solidFill>
-                <a:latin typeface="Inter" pitchFamily="34" charset="0"/>
-                <a:ea typeface="Inter" pitchFamily="34" charset="-122"/>
-                <a:cs typeface="Inter" pitchFamily="34" charset="-120"/>
-              </a:rPr>
-              <a:t>Governance </a:t>
-            </a:r>
-            <a:pPr algn="l" indent="0" marL="0">
-              <a:lnSpc>
-                <a:spcPts val="1950"/>
-              </a:lnSpc>
-              <a:buNone/>
-            </a:pPr>
-            <a:r>
-              <a:rPr lang="en-US" sz="1300" b="1" dirty="0">
-                <a:solidFill>
-                  <a:srgbClr val="252525"/>
-                </a:solidFill>
-                <a:latin typeface="Inter" pitchFamily="34" charset="0"/>
-                <a:ea typeface="Inter" pitchFamily="34" charset="-122"/>
-                <a:cs typeface="Inter" pitchFamily="34" charset="-120"/>
-              </a:rPr>
-              <a:t>decides</a:t>
-            </a:r>
-            <a:pPr algn="l" indent="0" marL="0">
-              <a:lnSpc>
-                <a:spcPts val="1950"/>
-              </a:lnSpc>
-              <a:buNone/>
-            </a:pPr>
-            <a:r>
-              <a:rPr lang="en-US" sz="1300" dirty="0">
-                <a:solidFill>
-                  <a:srgbClr val="252525"/>
-                </a:solidFill>
-                <a:latin typeface="Inter" pitchFamily="34" charset="0"/>
-                <a:ea typeface="Inter" pitchFamily="34" charset="-122"/>
-                <a:cs typeface="Inter" pitchFamily="34" charset="-120"/>
-              </a:rPr>
-              <a:t>: the tier, the control set, the owner, the evidence required. It has to cover every runtime, including those with no enforcement of their own.</a:t>
-            </a:r>
-            <a:endParaRPr lang="en-US" sz="1300" dirty="0"/>
-          </a:p>
-        </p:txBody>
-      </p:sp>
-      <p:sp>
-        <p:nvSpPr>
-          <p:cNvPr id="5" name="Text 2"/>
-          <p:cNvSpPr/>
-          <p:nvPr/>
-        </p:nvSpPr>
-        <p:spPr>
-          <a:xfrm>
-            <a:off x="830521" y="3330116"/>
-            <a:ext cx="2842350" cy="989778"/>
-          </a:xfrm>
-          <a:prstGeom prst="rect">
-            <a:avLst/>
-          </a:prstGeom>
-          <a:noFill/>
-          <a:ln/>
-        </p:spPr>
-        <p:txBody>
-          <a:bodyPr wrap="square" lIns="0" tIns="0" rIns="0" bIns="0" rtlCol="0" anchor="t"/>
-          <a:lstStyle/>
-          <a:p>
-            <a:pPr algn="l" indent="0" marL="0">
-              <a:lnSpc>
-                <a:spcPts val="1950"/>
-              </a:lnSpc>
-              <a:buNone/>
-            </a:pPr>
-            <a:r>
-              <a:rPr lang="en-US" sz="1300" dirty="0">
-                <a:solidFill>
-                  <a:srgbClr val="252525"/>
-                </a:solidFill>
-                <a:latin typeface="Inter" pitchFamily="34" charset="0"/>
-                <a:ea typeface="Inter" pitchFamily="34" charset="-122"/>
-                <a:cs typeface="Inter" pitchFamily="34" charset="-120"/>
-              </a:rPr>
-              <a:t>Enforcement applies the decision at the moment of action: allow, block, escalate. It lives in each runtime and must be fast.</a:t>
-            </a:r>
-            <a:endParaRPr lang="en-US" sz="1300" dirty="0"/>
-          </a:p>
-        </p:txBody>
-      </p:sp>
-      <p:sp>
-        <p:nvSpPr>
-          <p:cNvPr id="6" name="Text 3"/>
-          <p:cNvSpPr/>
-          <p:nvPr/>
-        </p:nvSpPr>
-        <p:spPr>
-          <a:xfrm>
-            <a:off x="830521" y="4429143"/>
-            <a:ext cx="2842350" cy="1484667"/>
-          </a:xfrm>
-          <a:prstGeom prst="rect">
-            <a:avLst/>
-          </a:prstGeom>
-          <a:noFill/>
-          <a:ln/>
-        </p:spPr>
-        <p:txBody>
-          <a:bodyPr wrap="square" lIns="0" tIns="0" rIns="0" bIns="0" rtlCol="0" anchor="t"/>
-          <a:lstStyle/>
-          <a:p>
-            <a:pPr algn="l" indent="0" marL="0">
-              <a:lnSpc>
-                <a:spcPts val="1950"/>
-              </a:lnSpc>
-              <a:buNone/>
-            </a:pPr>
-            <a:r>
-              <a:rPr lang="en-US" sz="1300" dirty="0">
-                <a:solidFill>
-                  <a:srgbClr val="252525"/>
-                </a:solidFill>
-                <a:latin typeface="Inter" pitchFamily="34" charset="0"/>
-                <a:ea typeface="Inter" pitchFamily="34" charset="-122"/>
-                <a:cs typeface="Inter" pitchFamily="34" charset="-120"/>
-              </a:rPr>
-              <a:t>ROADMAP: Controls are authored once, with prose for the person and parameters for the machine, then compiled per runtime. Saidot enables enforcement. It does not sit in the hot path.</a:t>
-            </a:r>
-            <a:endParaRPr lang="en-US" sz="1300" dirty="0"/>
+      <p:pic>
+        <p:nvPicPr>
+          <p:cNvPr id="3" name="Image 1" descr="preencoded.png">    </p:cNvPr>
+          <p:cNvPicPr>
+            <a:picLocks noChangeAspect="1"/>
+          </p:cNvPicPr>
+          <p:nvPr/>
+        </p:nvPicPr>
+        <p:blipFill>
+          <a:blip r:embed="rId2"/>
+          <a:stretch>
+            <a:fillRect/>
+          </a:stretch>
+        </p:blipFill>
+        <p:spPr>
+          <a:xfrm>
+            <a:off x="10942415" y="6363421"/>
+            <a:ext cx="914400" cy="234892"/>
+          </a:xfrm>
+          <a:prstGeom prst="rect">
+            <a:avLst/>
+          </a:prstGeom>
+        </p:spPr>
+      </p:pic>
+      <p:sp>
+        <p:nvSpPr>
+          <p:cNvPr id="4" name="Text 0"/>
+          <p:cNvSpPr/>
+          <p:nvPr/>
+        </p:nvSpPr>
+        <p:spPr>
+          <a:xfrm>
+            <a:off x="830520" y="1212205"/>
+            <a:ext cx="5014049" cy="411361"/>
+          </a:xfrm>
+          <a:prstGeom prst="rect">
+            <a:avLst/>
+          </a:prstGeom>
+          <a:noFill/>
+          <a:ln/>
+        </p:spPr>
+        <p:txBody>
+          <a:bodyPr wrap="square" lIns="0" tIns="0" rIns="0" bIns="0" rtlCol="0" anchor="t"/>
+          <a:lstStyle/>
+          <a:p>
+            <a:pPr algn="l" indent="0" marL="0">
+              <a:lnSpc>
+                <a:spcPts val="3240"/>
+              </a:lnSpc>
+              <a:buNone/>
+            </a:pPr>
+            <a:r>
+              <a:rPr lang="en-US" sz="2950" dirty="0">
+                <a:solidFill>
+                  <a:srgbClr val="111318"/>
+                </a:solidFill>
+                <a:latin typeface="Libre Franklin" pitchFamily="34" charset="0"/>
+                <a:ea typeface="Libre Franklin" pitchFamily="34" charset="-122"/>
+                <a:cs typeface="Libre Franklin" pitchFamily="34" charset="-120"/>
+              </a:rPr>
+              <a:t>Three lines, one record</a:t>
+            </a:r>
+            <a:endParaRPr lang="en-US" sz="2950" dirty="0"/>
+          </a:p>
+        </p:txBody>
+      </p:sp>
+      <p:sp>
+        <p:nvSpPr>
+          <p:cNvPr id="5" name="Text 1"/>
+          <p:cNvSpPr/>
+          <p:nvPr/>
+        </p:nvSpPr>
+        <p:spPr>
+          <a:xfrm>
+            <a:off x="830520" y="1732062"/>
+            <a:ext cx="5014049" cy="814388"/>
+          </a:xfrm>
+          <a:prstGeom prst="rect">
+            <a:avLst/>
+          </a:prstGeom>
+          <a:noFill/>
+          <a:ln/>
+        </p:spPr>
+        <p:txBody>
+          <a:bodyPr wrap="square" lIns="0" tIns="0" rIns="0" bIns="0" rtlCol="0" anchor="t"/>
+          <a:lstStyle/>
+          <a:p>
+            <a:pPr algn="l" indent="0" marL="0">
+              <a:lnSpc>
+                <a:spcPts val="2140"/>
+              </a:lnSpc>
+              <a:buNone/>
+            </a:pPr>
+            <a:r>
+              <a:rPr lang="en-US" sz="1430" i="1" dirty="0">
+                <a:solidFill>
+                  <a:srgbClr val="111318"/>
+                </a:solidFill>
+                <a:latin typeface="Libre Franklin" pitchFamily="34" charset="0"/>
+                <a:ea typeface="Libre Franklin" pitchFamily="34" charset="-122"/>
+                <a:cs typeface="Libre Franklin" pitchFamily="34" charset="-120"/>
+              </a:rPr>
+              <a:t>The model is not new.</a:t>
+            </a:r>
+            <a:pPr algn="l" indent="0" marL="0">
+              <a:lnSpc>
+                <a:spcPts val="2140"/>
+              </a:lnSpc>
+              <a:buNone/>
+            </a:pPr>
+            <a:r>
+              <a:rPr lang="en-US" sz="1430" dirty="0">
+                <a:solidFill>
+                  <a:srgbClr val="111318"/>
+                </a:solidFill>
+                <a:latin typeface="Libre Franklin" pitchFamily="34" charset="0"/>
+                <a:ea typeface="Libre Franklin" pitchFamily="34" charset="-122"/>
+                <a:cs typeface="Libre Franklin" pitchFamily="34" charset="-120"/>
+              </a:rPr>
+              <a:t> What is new is what sits in the first line: a platform that enforces its own controls and reports on itself.</a:t>
+            </a:r>
+            <a:endParaRPr lang="en-US" sz="1430" dirty="0"/>
+          </a:p>
+        </p:txBody>
+      </p:sp>
+      <p:sp>
+        <p:nvSpPr>
+          <p:cNvPr id="6" name="Text 2"/>
+          <p:cNvSpPr/>
+          <p:nvPr/>
+        </p:nvSpPr>
+        <p:spPr>
+          <a:xfrm>
+            <a:off x="830520" y="2645866"/>
+            <a:ext cx="5014049" cy="814388"/>
+          </a:xfrm>
+          <a:prstGeom prst="rect">
+            <a:avLst/>
+          </a:prstGeom>
+          <a:noFill/>
+          <a:ln/>
+        </p:spPr>
+        <p:txBody>
+          <a:bodyPr wrap="square" lIns="0" tIns="0" rIns="0" bIns="0" rtlCol="0" anchor="t"/>
+          <a:lstStyle/>
+          <a:p>
+            <a:pPr algn="l" indent="0" marL="0">
+              <a:lnSpc>
+                <a:spcPts val="2140"/>
+              </a:lnSpc>
+              <a:buNone/>
+            </a:pPr>
+            <a:r>
+              <a:rPr lang="en-US" sz="1430" dirty="0">
+                <a:solidFill>
+                  <a:srgbClr val="111318"/>
+                </a:solidFill>
+                <a:latin typeface="Libre Franklin" pitchFamily="34" charset="0"/>
+                <a:ea typeface="Libre Franklin" pitchFamily="34" charset="-122"/>
+                <a:cs typeface="Libre Franklin" pitchFamily="34" charset="-120"/>
+              </a:rPr>
+              <a:t>The second line needs its own record. The first line emits the evidence. It does not hold the register, set the tier, or decide when a control is satisfied.</a:t>
+            </a:r>
+            <a:endParaRPr lang="en-US" sz="1430" dirty="0"/>
+          </a:p>
+        </p:txBody>
+      </p:sp>
+      <p:sp>
+        <p:nvSpPr>
+          <p:cNvPr id="7" name="Text 3"/>
+          <p:cNvSpPr/>
+          <p:nvPr/>
+        </p:nvSpPr>
+        <p:spPr>
+          <a:xfrm>
+            <a:off x="830520" y="3559671"/>
+            <a:ext cx="5014049" cy="1085850"/>
+          </a:xfrm>
+          <a:prstGeom prst="rect">
+            <a:avLst/>
+          </a:prstGeom>
+          <a:noFill/>
+          <a:ln/>
+        </p:spPr>
+        <p:txBody>
+          <a:bodyPr wrap="square" lIns="0" tIns="0" rIns="0" bIns="0" rtlCol="0" anchor="t"/>
+          <a:lstStyle/>
+          <a:p>
+            <a:pPr algn="l" indent="0" marL="0">
+              <a:lnSpc>
+                <a:spcPts val="2140"/>
+              </a:lnSpc>
+              <a:buNone/>
+            </a:pPr>
+            <a:r>
+              <a:rPr lang="en-US" sz="1430" dirty="0">
+                <a:solidFill>
+                  <a:srgbClr val="111318"/>
+                </a:solidFill>
+                <a:latin typeface="Libre Franklin" pitchFamily="34" charset="0"/>
+                <a:ea typeface="Libre Franklin" pitchFamily="34" charset="-122"/>
+                <a:cs typeface="Libre Franklin" pitchFamily="34" charset="-120"/>
+              </a:rPr>
+              <a:t>The third line tests that record against what actually ran, sampling the runtime directly. Neither internal audit nor an external assessor should have to ask the teams under audit to assemble their own evidence.</a:t>
+            </a:r>
+            <a:endParaRPr lang="en-US" sz="1430" dirty="0"/>
+          </a:p>
+        </p:txBody>
+      </p:sp>
+      <p:sp>
+        <p:nvSpPr>
+          <p:cNvPr id="8" name="Text 4"/>
+          <p:cNvSpPr/>
+          <p:nvPr/>
+        </p:nvSpPr>
+        <p:spPr>
+          <a:xfrm>
+            <a:off x="830520" y="4744938"/>
+            <a:ext cx="5014049" cy="900708"/>
+          </a:xfrm>
+          <a:prstGeom prst="rect">
+            <a:avLst/>
+          </a:prstGeom>
+          <a:noFill/>
+          <a:ln/>
+        </p:spPr>
+        <p:txBody>
+          <a:bodyPr wrap="square" lIns="0" tIns="0" rIns="0" bIns="0" rtlCol="0" anchor="t"/>
+          <a:lstStyle/>
+          <a:p>
+            <a:pPr algn="l" indent="0" marL="0">
+              <a:lnSpc>
+                <a:spcPts val="1770"/>
+              </a:lnSpc>
+              <a:buNone/>
+            </a:pPr>
+            <a:r>
+              <a:rPr lang="en-US" sz="1180" dirty="0">
+                <a:solidFill>
+                  <a:srgbClr val="5B6270"/>
+                </a:solidFill>
+                <a:latin typeface="Libre Franklin" pitchFamily="34" charset="0"/>
+                <a:ea typeface="Libre Franklin" pitchFamily="34" charset="-122"/>
+                <a:cs typeface="Libre Franklin" pitchFamily="34" charset="-120"/>
+              </a:rPr>
+              <a:t>ISO/IEC 42001 asks for internal audit and management review.</a:t>
+            </a:r>
+            <a:pPr algn="l" indent="0" marL="0">
+              <a:lnSpc>
+                <a:spcPts val="1770"/>
+              </a:lnSpc>
+              <a:buNone/>
+            </a:pPr>
+            <a:r>
+              <a:rPr lang="en-US" sz="1180" dirty="0">
+                <a:solidFill>
+                  <a:srgbClr val="5B6270"/>
+                </a:solidFill>
+                <a:latin typeface="Libre Franklin" pitchFamily="34" charset="0"/>
+                <a:ea typeface="Libre Franklin" pitchFamily="34" charset="-122"/>
+                <a:cs typeface="Libre Franklin" pitchFamily="34" charset="-120"/>
+              </a:rPr>
+              <a:t> The EU AI Act asks high-risk providers for a conformity assessment, in most cases their own, and the technical documentation behind it. Both assume the record exists.</a:t>
+            </a:r>
+            <a:endParaRPr lang="en-US" sz="1180" dirty="0"/>
+          </a:p>
+        </p:txBody>
+      </p:sp>
+      <p:sp>
+        <p:nvSpPr>
+          <p:cNvPr id="9" name="Text 5"/>
+          <p:cNvSpPr/>
+          <p:nvPr/>
+        </p:nvSpPr>
+        <p:spPr>
+          <a:xfrm>
+            <a:off x="220920" y="6530429"/>
+            <a:ext cx="114627" cy="114300"/>
+          </a:xfrm>
+          <a:prstGeom prst="rect">
+            <a:avLst/>
+          </a:prstGeom>
+          <a:noFill/>
+          <a:ln/>
+        </p:spPr>
+        <p:txBody>
+          <a:bodyPr wrap="square" lIns="0" tIns="0" rIns="0" bIns="0" rtlCol="0" anchor="t"/>
+          <a:lstStyle/>
+          <a:p>
+            <a:pPr algn="l" indent="0" marL="0">
+              <a:lnSpc>
+                <a:spcPts val="900"/>
+              </a:lnSpc>
+              <a:buNone/>
+            </a:pPr>
+            <a:r>
+              <a:rPr lang="en-US" sz="900" dirty="0">
+                <a:solidFill>
+                  <a:srgbClr val="949597"/>
+                </a:solidFill>
+                <a:latin typeface="SF Mono" pitchFamily="34" charset="0"/>
+                <a:ea typeface="SF Mono" pitchFamily="34" charset="-122"/>
+                <a:cs typeface="SF Mono" pitchFamily="34" charset="-120"/>
+              </a:rPr>
+              <a:t>3</a:t>
+            </a:r>
+            <a:endParaRPr lang="en-US" sz="900" dirty="0"/>
           </a:p>
         </p:txBody>
       </p:sp>
@@ -2259,178 +2686,244 @@
         <p:spPr>
           <a:xfrm>
             <a:off x="0" y="0"/>
-            <a:ext cx="12192000" cy="6857959"/>
+            <a:ext cx="12192000" cy="6858000"/>
           </a:xfrm>
           <a:prstGeom prst="rect">
             <a:avLst/>
           </a:prstGeom>
         </p:spPr>
       </p:pic>
-      <p:sp>
-        <p:nvSpPr>
-          <p:cNvPr id="3" name="Text 0"/>
-          <p:cNvSpPr/>
-          <p:nvPr/>
-        </p:nvSpPr>
-        <p:spPr>
-          <a:xfrm>
-            <a:off x="8812856" y="112683"/>
-            <a:ext cx="2548622" cy="1840870"/>
-          </a:xfrm>
-          <a:prstGeom prst="rect">
-            <a:avLst/>
-          </a:prstGeom>
-          <a:noFill/>
-          <a:ln/>
-        </p:spPr>
-        <p:txBody>
-          <a:bodyPr wrap="square" lIns="0" tIns="0" rIns="0" bIns="0" rtlCol="0" anchor="t"/>
-          <a:lstStyle/>
-          <a:p>
-            <a:pPr algn="l" indent="0" marL="0">
-              <a:lnSpc>
-                <a:spcPts val="3620"/>
-              </a:lnSpc>
-              <a:buNone/>
-            </a:pPr>
-            <a:r>
-              <a:rPr lang="en-US" sz="3240" dirty="0">
-                <a:solidFill>
-                  <a:srgbClr val="252525"/>
-                </a:solidFill>
-                <a:latin typeface="Copyright Peregrin Studio" pitchFamily="34" charset="0"/>
-                <a:ea typeface="Copyright Peregrin Studio" pitchFamily="34" charset="-122"/>
-                <a:cs typeface="Copyright Peregrin Studio" pitchFamily="34" charset="-120"/>
-              </a:rPr>
-              <a:t>Evidence comes back from production</a:t>
-            </a:r>
-            <a:endParaRPr lang="en-US" sz="3240" dirty="0"/>
-          </a:p>
-        </p:txBody>
-      </p:sp>
-      <p:sp>
-        <p:nvSpPr>
-          <p:cNvPr id="4" name="Text 1"/>
-          <p:cNvSpPr/>
-          <p:nvPr/>
-        </p:nvSpPr>
-        <p:spPr>
-          <a:xfrm>
-            <a:off x="8812856" y="2072777"/>
-            <a:ext cx="2548622" cy="1484667"/>
-          </a:xfrm>
-          <a:prstGeom prst="rect">
-            <a:avLst/>
-          </a:prstGeom>
-          <a:noFill/>
-          <a:ln/>
-        </p:spPr>
-        <p:txBody>
-          <a:bodyPr wrap="square" lIns="0" tIns="0" rIns="0" bIns="0" rtlCol="0" anchor="t"/>
-          <a:lstStyle/>
-          <a:p>
-            <a:pPr algn="l" indent="0" marL="0">
-              <a:lnSpc>
-                <a:spcPts val="1950"/>
-              </a:lnSpc>
-              <a:buNone/>
-            </a:pPr>
-            <a:r>
-              <a:rPr lang="en-US" sz="1300" dirty="0">
-                <a:solidFill>
-                  <a:srgbClr val="252525"/>
-                </a:solidFill>
-                <a:latin typeface="Inter" pitchFamily="34" charset="0"/>
-                <a:ea typeface="Inter" pitchFamily="34" charset="-122"/>
-                <a:cs typeface="Inter" pitchFamily="34" charset="-120"/>
-              </a:rPr>
-              <a:t>Runtime observability events are ingested from the AI stack. An event can open an incident, trigger a review or change the risk level on an agent, a model or a system.</a:t>
-            </a:r>
-            <a:endParaRPr lang="en-US" sz="1300" dirty="0"/>
-          </a:p>
-        </p:txBody>
-      </p:sp>
-      <p:sp>
-        <p:nvSpPr>
-          <p:cNvPr id="5" name="Text 2"/>
-          <p:cNvSpPr/>
-          <p:nvPr/>
-        </p:nvSpPr>
-        <p:spPr>
-          <a:xfrm>
-            <a:off x="8812856" y="3666693"/>
-            <a:ext cx="2548622" cy="2227001"/>
-          </a:xfrm>
-          <a:prstGeom prst="rect">
-            <a:avLst/>
-          </a:prstGeom>
-          <a:noFill/>
-          <a:ln/>
-        </p:spPr>
-        <p:txBody>
-          <a:bodyPr wrap="square" lIns="0" tIns="0" rIns="0" bIns="0" rtlCol="0" anchor="t"/>
-          <a:lstStyle/>
-          <a:p>
-            <a:pPr algn="l" indent="0" marL="0">
-              <a:lnSpc>
-                <a:spcPts val="1950"/>
-              </a:lnSpc>
-              <a:buNone/>
-            </a:pPr>
-            <a:r>
-              <a:rPr lang="en-US" sz="1300" dirty="0">
-                <a:solidFill>
-                  <a:srgbClr val="252525"/>
-                </a:solidFill>
-                <a:latin typeface="Inter" pitchFamily="34" charset="0"/>
-                <a:ea typeface="Inter" pitchFamily="34" charset="-122"/>
-                <a:cs typeface="Inter" pitchFamily="34" charset="-120"/>
-              </a:rPr>
-              <a:t>Evidence attaches to the control on the system's record, with the classification, the approvals and the audit trail beside it. Reused across systems, exported on demand - and traceable from the obligation to the event that proved it.</a:t>
-            </a:r>
-            <a:endParaRPr lang="en-US" sz="1300" dirty="0"/>
-          </a:p>
-        </p:txBody>
-      </p:sp>
-      <p:sp>
-        <p:nvSpPr>
-          <p:cNvPr id="6" name="Text 3"/>
-          <p:cNvSpPr/>
-          <p:nvPr/>
-        </p:nvSpPr>
-        <p:spPr>
-          <a:xfrm>
-            <a:off x="8812856" y="6002943"/>
-            <a:ext cx="2548622" cy="742334"/>
-          </a:xfrm>
-          <a:prstGeom prst="rect">
-            <a:avLst/>
-          </a:prstGeom>
-          <a:noFill/>
-          <a:ln/>
-        </p:spPr>
-        <p:txBody>
-          <a:bodyPr wrap="square" lIns="0" tIns="0" rIns="0" bIns="0" rtlCol="0" anchor="t"/>
-          <a:lstStyle/>
-          <a:p>
-            <a:pPr algn="l" indent="0" marL="0">
-              <a:lnSpc>
-                <a:spcPts val="1950"/>
-              </a:lnSpc>
-              <a:buNone/>
-            </a:pPr>
-            <a:r>
-              <a:rPr lang="en-US" sz="1300" dirty="0">
-                <a:solidFill>
-                  <a:srgbClr val="252525"/>
-                </a:solidFill>
-                <a:latin typeface="Inter" pitchFamily="34" charset="0"/>
-                <a:ea typeface="Inter" pitchFamily="34" charset="-122"/>
-                <a:cs typeface="Inter" pitchFamily="34" charset="-120"/>
-              </a:rPr>
-              <a:t>A runtime that cannot check a control returns that as a named gap. Never a silent pass.</a:t>
-            </a:r>
-            <a:endParaRPr lang="en-US" sz="1300" dirty="0"/>
+      <p:pic>
+        <p:nvPicPr>
+          <p:cNvPr id="3" name="Image 1" descr="preencoded.png">    </p:cNvPr>
+          <p:cNvPicPr>
+            <a:picLocks noChangeAspect="1"/>
+          </p:cNvPicPr>
+          <p:nvPr/>
+        </p:nvPicPr>
+        <p:blipFill>
+          <a:blip r:embed="rId2"/>
+          <a:stretch>
+            <a:fillRect/>
+          </a:stretch>
+        </p:blipFill>
+        <p:spPr>
+          <a:xfrm>
+            <a:off x="10942415" y="6363421"/>
+            <a:ext cx="914400" cy="234892"/>
+          </a:xfrm>
+          <a:prstGeom prst="rect">
+            <a:avLst/>
+          </a:prstGeom>
+        </p:spPr>
+      </p:pic>
+      <p:sp>
+        <p:nvSpPr>
+          <p:cNvPr id="4" name="Text 0"/>
+          <p:cNvSpPr/>
+          <p:nvPr/>
+        </p:nvSpPr>
+        <p:spPr>
+          <a:xfrm>
+            <a:off x="830520" y="1175147"/>
+            <a:ext cx="2982099" cy="822722"/>
+          </a:xfrm>
+          <a:prstGeom prst="rect">
+            <a:avLst/>
+          </a:prstGeom>
+          <a:noFill/>
+          <a:ln/>
+        </p:spPr>
+        <p:txBody>
+          <a:bodyPr wrap="square" lIns="0" tIns="0" rIns="0" bIns="0" rtlCol="0" anchor="t"/>
+          <a:lstStyle/>
+          <a:p>
+            <a:pPr algn="l" indent="0" marL="0">
+              <a:lnSpc>
+                <a:spcPts val="3240"/>
+              </a:lnSpc>
+              <a:buNone/>
+            </a:pPr>
+            <a:r>
+              <a:rPr lang="en-US" sz="2950" dirty="0">
+                <a:solidFill>
+                  <a:srgbClr val="111318"/>
+                </a:solidFill>
+                <a:latin typeface="Libre Franklin" pitchFamily="34" charset="0"/>
+                <a:ea typeface="Libre Franklin" pitchFamily="34" charset="-122"/>
+                <a:cs typeface="Libre Franklin" pitchFamily="34" charset="-120"/>
+              </a:rPr>
+              <a:t>Governance is a separate role</a:t>
+            </a:r>
+            <a:endParaRPr lang="en-US" sz="2950" dirty="0"/>
+          </a:p>
+        </p:txBody>
+      </p:sp>
+      <p:sp>
+        <p:nvSpPr>
+          <p:cNvPr id="5" name="Text 1"/>
+          <p:cNvSpPr/>
+          <p:nvPr/>
+        </p:nvSpPr>
+        <p:spPr>
+          <a:xfrm>
+            <a:off x="830520" y="2106364"/>
+            <a:ext cx="2982099" cy="1576239"/>
+          </a:xfrm>
+          <a:prstGeom prst="rect">
+            <a:avLst/>
+          </a:prstGeom>
+          <a:noFill/>
+          <a:ln/>
+        </p:spPr>
+        <p:txBody>
+          <a:bodyPr wrap="square" lIns="0" tIns="0" rIns="0" bIns="0" rtlCol="0" anchor="t"/>
+          <a:lstStyle/>
+          <a:p>
+            <a:pPr algn="l" indent="0" marL="0">
+              <a:lnSpc>
+                <a:spcPts val="1770"/>
+              </a:lnSpc>
+              <a:buNone/>
+            </a:pPr>
+            <a:r>
+              <a:rPr lang="en-US" sz="1180" i="1" dirty="0">
+                <a:solidFill>
+                  <a:srgbClr val="111318"/>
+                </a:solidFill>
+                <a:latin typeface="Libre Franklin" pitchFamily="34" charset="0"/>
+                <a:ea typeface="Libre Franklin" pitchFamily="34" charset="-122"/>
+                <a:cs typeface="Libre Franklin" pitchFamily="34" charset="-120"/>
+              </a:rPr>
+              <a:t>The decisions are the organisation's: which frameworks apply, the risk appetite, the tier of each system, the controls it must satisfy, who is accountable. They have to survive a platform swap - or systems covering many - so they live above all of the platforms, in one place.</a:t>
+            </a:r>
+            <a:endParaRPr lang="en-US" sz="1180" dirty="0"/>
+          </a:p>
+        </p:txBody>
+      </p:sp>
+      <p:sp>
+        <p:nvSpPr>
+          <p:cNvPr id="6" name="Text 2"/>
+          <p:cNvSpPr/>
+          <p:nvPr/>
+        </p:nvSpPr>
+        <p:spPr>
+          <a:xfrm>
+            <a:off x="830520" y="3782020"/>
+            <a:ext cx="2982099" cy="900708"/>
+          </a:xfrm>
+          <a:prstGeom prst="rect">
+            <a:avLst/>
+          </a:prstGeom>
+          <a:noFill/>
+          <a:ln/>
+        </p:spPr>
+        <p:txBody>
+          <a:bodyPr wrap="square" lIns="0" tIns="0" rIns="0" bIns="0" rtlCol="0" anchor="t"/>
+          <a:lstStyle/>
+          <a:p>
+            <a:pPr algn="l" indent="0" marL="0">
+              <a:lnSpc>
+                <a:spcPts val="1770"/>
+              </a:lnSpc>
+              <a:buNone/>
+            </a:pPr>
+            <a:r>
+              <a:rPr lang="en-US" sz="1180" dirty="0">
+                <a:solidFill>
+                  <a:srgbClr val="111318"/>
+                </a:solidFill>
+                <a:latin typeface="Libre Franklin" pitchFamily="34" charset="0"/>
+                <a:ea typeface="Libre Franklin" pitchFamily="34" charset="-122"/>
+                <a:cs typeface="Libre Franklin" pitchFamily="34" charset="-120"/>
+              </a:rPr>
+              <a:t>A runtime enforces what it runs and reports on itself. Oversight of that enforcement is a different accountability. The first line cannot be its own second.</a:t>
+            </a:r>
+            <a:endParaRPr lang="en-US" sz="1180" dirty="0"/>
+          </a:p>
+        </p:txBody>
+      </p:sp>
+      <p:sp>
+        <p:nvSpPr>
+          <p:cNvPr id="7" name="Text 3"/>
+          <p:cNvSpPr/>
+          <p:nvPr/>
+        </p:nvSpPr>
+        <p:spPr>
+          <a:xfrm>
+            <a:off x="830520" y="4782145"/>
+            <a:ext cx="2982099" cy="900708"/>
+          </a:xfrm>
+          <a:prstGeom prst="rect">
+            <a:avLst/>
+          </a:prstGeom>
+          <a:noFill/>
+          <a:ln/>
+        </p:spPr>
+        <p:txBody>
+          <a:bodyPr wrap="square" lIns="0" tIns="0" rIns="0" bIns="0" rtlCol="0" anchor="t"/>
+          <a:lstStyle/>
+          <a:p>
+            <a:pPr algn="l" indent="0" marL="0">
+              <a:lnSpc>
+                <a:spcPts val="1770"/>
+              </a:lnSpc>
+              <a:buNone/>
+            </a:pPr>
+            <a:r>
+              <a:rPr lang="en-US" sz="1180" dirty="0">
+                <a:solidFill>
+                  <a:srgbClr val="111318"/>
+                </a:solidFill>
+                <a:latin typeface="Libre Franklin" pitchFamily="34" charset="0"/>
+                <a:ea typeface="Libre Franklin" pitchFamily="34" charset="-122"/>
+                <a:cs typeface="Libre Franklin" pitchFamily="34" charset="-120"/>
+              </a:rPr>
+              <a:t>The platform knows who ran a workflow. It does not know the system's purpose, its tier or its owner. Risk is contextual, so that is decided where the use case is.</a:t>
+            </a:r>
+            <a:endParaRPr lang="en-US" sz="1180" dirty="0"/>
+          </a:p>
+        </p:txBody>
+      </p:sp>
+      <p:sp>
+        <p:nvSpPr>
+          <p:cNvPr id="8" name="Text 4"/>
+          <p:cNvSpPr/>
+          <p:nvPr/>
+        </p:nvSpPr>
+        <p:spPr>
+          <a:xfrm>
+            <a:off x="220920" y="6530429"/>
+            <a:ext cx="114627" cy="114300"/>
+          </a:xfrm>
+          <a:prstGeom prst="rect">
+            <a:avLst/>
+          </a:prstGeom>
+          <a:noFill/>
+          <a:ln/>
+        </p:spPr>
+        <p:txBody>
+          <a:bodyPr wrap="square" lIns="0" tIns="0" rIns="0" bIns="0" rtlCol="0" anchor="t"/>
+          <a:lstStyle/>
+          <a:p>
+            <a:pPr algn="l" indent="0" marL="0">
+              <a:lnSpc>
+                <a:spcPts val="900"/>
+              </a:lnSpc>
+              <a:buNone/>
+            </a:pPr>
+            <a:r>
+              <a:rPr lang="en-US" sz="900" dirty="0">
+                <a:solidFill>
+                  <a:srgbClr val="949597"/>
+                </a:solidFill>
+                <a:latin typeface="SF Mono" pitchFamily="34" charset="0"/>
+                <a:ea typeface="SF Mono" pitchFamily="34" charset="-122"/>
+                <a:cs typeface="SF Mono" pitchFamily="34" charset="-120"/>
+              </a:rPr>
+              <a:t>4</a:t>
+            </a:r>
+            <a:endParaRPr lang="en-US" sz="900" dirty="0"/>
           </a:p>
         </p:txBody>
       </p:sp>
@@ -2476,346 +2969,236 @@
         <p:spPr>
           <a:xfrm>
             <a:off x="0" y="0"/>
-            <a:ext cx="12192000" cy="6857959"/>
+            <a:ext cx="12192000" cy="6858000"/>
           </a:xfrm>
           <a:prstGeom prst="rect">
             <a:avLst/>
           </a:prstGeom>
         </p:spPr>
       </p:pic>
-      <p:sp>
-        <p:nvSpPr>
-          <p:cNvPr id="3" name="Text 0"/>
-          <p:cNvSpPr/>
-          <p:nvPr/>
-        </p:nvSpPr>
-        <p:spPr>
-          <a:xfrm>
-            <a:off x="830521" y="886908"/>
-            <a:ext cx="10530958" cy="554583"/>
-          </a:xfrm>
-          <a:prstGeom prst="rect">
-            <a:avLst/>
-          </a:prstGeom>
-          <a:noFill/>
-          <a:ln/>
-        </p:spPr>
-        <p:txBody>
-          <a:bodyPr wrap="square" lIns="0" tIns="0" rIns="0" bIns="0" rtlCol="0" anchor="t"/>
-          <a:lstStyle/>
-          <a:p>
-            <a:pPr algn="l" indent="0" marL="0">
-              <a:lnSpc>
-                <a:spcPts val="4370"/>
-              </a:lnSpc>
-              <a:buNone/>
-            </a:pPr>
-            <a:r>
-              <a:rPr lang="en-US" sz="3900" dirty="0">
-                <a:solidFill>
-                  <a:srgbClr val="000000"/>
-                </a:solidFill>
-                <a:latin typeface="Copyright Peregrin Studio" pitchFamily="34" charset="0"/>
-                <a:ea typeface="Copyright Peregrin Studio" pitchFamily="34" charset="-122"/>
-                <a:cs typeface="Copyright Peregrin Studio" pitchFamily="34" charset="-120"/>
-              </a:rPr>
-              <a:t>Governance stays a gate. It stops being a queue.</a:t>
-            </a:r>
-            <a:endParaRPr lang="en-US" sz="3900" dirty="0"/>
-          </a:p>
-        </p:txBody>
-      </p:sp>
-      <p:sp>
-        <p:nvSpPr>
-          <p:cNvPr id="4" name="Text 1"/>
-          <p:cNvSpPr/>
-          <p:nvPr/>
-        </p:nvSpPr>
-        <p:spPr>
-          <a:xfrm>
-            <a:off x="830521" y="2122168"/>
-            <a:ext cx="3355229" cy="298307"/>
-          </a:xfrm>
-          <a:prstGeom prst="rect">
-            <a:avLst/>
-          </a:prstGeom>
-          <a:noFill/>
-          <a:ln/>
-        </p:spPr>
-        <p:txBody>
-          <a:bodyPr wrap="square" lIns="0" tIns="0" rIns="0" bIns="0" rtlCol="0" anchor="t"/>
-          <a:lstStyle/>
-          <a:p>
-            <a:pPr algn="l" indent="0" marL="0">
-              <a:lnSpc>
-                <a:spcPts val="2350"/>
-              </a:lnSpc>
-              <a:buNone/>
-            </a:pPr>
-            <a:r>
-              <a:rPr lang="en-US" sz="1570" b="1" dirty="0">
-                <a:solidFill>
-                  <a:srgbClr val="252525"/>
-                </a:solidFill>
-                <a:latin typeface="Inter" pitchFamily="34" charset="0"/>
-                <a:ea typeface="Inter" pitchFamily="34" charset="-122"/>
-                <a:cs typeface="Inter" pitchFamily="34" charset="-120"/>
-              </a:rPr>
-              <a:t>Workflows</a:t>
-            </a:r>
-            <a:endParaRPr lang="en-US" sz="1570" dirty="0"/>
-          </a:p>
-        </p:txBody>
-      </p:sp>
-      <p:sp>
-        <p:nvSpPr>
-          <p:cNvPr id="5" name="Text 2"/>
-          <p:cNvSpPr/>
-          <p:nvPr/>
-        </p:nvSpPr>
-        <p:spPr>
-          <a:xfrm>
-            <a:off x="830521" y="2489982"/>
-            <a:ext cx="3355229" cy="2088151"/>
-          </a:xfrm>
-          <a:prstGeom prst="rect">
-            <a:avLst/>
-          </a:prstGeom>
-          <a:noFill/>
-          <a:ln/>
-        </p:spPr>
-        <p:txBody>
-          <a:bodyPr wrap="square" lIns="0" tIns="0" rIns="0" bIns="0" rtlCol="0" anchor="t"/>
-          <a:lstStyle/>
-          <a:p>
-            <a:pPr algn="l" indent="0" marL="0">
-              <a:lnSpc>
-                <a:spcPts val="2350"/>
-              </a:lnSpc>
-              <a:buNone/>
-            </a:pPr>
-            <a:r>
-              <a:rPr lang="en-US" sz="1570" dirty="0">
-                <a:solidFill>
-                  <a:srgbClr val="626262"/>
-                </a:solidFill>
-                <a:latin typeface="Inter" pitchFamily="34" charset="0"/>
-                <a:ea typeface="Inter" pitchFamily="34" charset="-122"/>
-                <a:cs typeface="Inter" pitchFamily="34" charset="-120"/>
-              </a:rPr>
-              <a:t>Rules do the routine. AI Act classification runs on registration and on change. Risks, risk levels and controls are inherited through the graph to every system whose properties match. Lifecycle stages gate on approval.</a:t>
-            </a:r>
-            <a:endParaRPr lang="en-US" sz="1570" dirty="0"/>
-          </a:p>
-        </p:txBody>
-      </p:sp>
-      <p:sp>
-        <p:nvSpPr>
-          <p:cNvPr id="6" name="Text 3"/>
-          <p:cNvSpPr/>
-          <p:nvPr/>
-        </p:nvSpPr>
-        <p:spPr>
-          <a:xfrm>
-            <a:off x="4418385" y="2122168"/>
-            <a:ext cx="3355229" cy="298307"/>
-          </a:xfrm>
-          <a:prstGeom prst="rect">
-            <a:avLst/>
-          </a:prstGeom>
-          <a:noFill/>
-          <a:ln/>
-        </p:spPr>
-        <p:txBody>
-          <a:bodyPr wrap="square" lIns="0" tIns="0" rIns="0" bIns="0" rtlCol="0" anchor="t"/>
-          <a:lstStyle/>
-          <a:p>
-            <a:pPr algn="l" indent="0" marL="0">
-              <a:lnSpc>
-                <a:spcPts val="2350"/>
-              </a:lnSpc>
-              <a:buNone/>
-            </a:pPr>
-            <a:r>
-              <a:rPr lang="en-US" sz="1570" b="1" dirty="0">
-                <a:solidFill>
-                  <a:srgbClr val="252525"/>
-                </a:solidFill>
-                <a:latin typeface="Inter" pitchFamily="34" charset="0"/>
-                <a:ea typeface="Inter" pitchFamily="34" charset="-122"/>
-                <a:cs typeface="Inter" pitchFamily="34" charset="-120"/>
-              </a:rPr>
-              <a:t>Tasks</a:t>
-            </a:r>
-            <a:endParaRPr lang="en-US" sz="1570" dirty="0"/>
-          </a:p>
-        </p:txBody>
-      </p:sp>
-      <p:sp>
-        <p:nvSpPr>
-          <p:cNvPr id="7" name="Text 4"/>
-          <p:cNvSpPr/>
-          <p:nvPr/>
-        </p:nvSpPr>
-        <p:spPr>
-          <a:xfrm>
-            <a:off x="4418385" y="2489982"/>
-            <a:ext cx="3355229" cy="2088151"/>
-          </a:xfrm>
-          <a:prstGeom prst="rect">
-            <a:avLst/>
-          </a:prstGeom>
-          <a:noFill/>
-          <a:ln/>
-        </p:spPr>
-        <p:txBody>
-          <a:bodyPr wrap="square" lIns="0" tIns="0" rIns="0" bIns="0" rtlCol="0" anchor="t"/>
-          <a:lstStyle/>
-          <a:p>
-            <a:pPr algn="l" indent="0" marL="0">
-              <a:lnSpc>
-                <a:spcPts val="2350"/>
-              </a:lnSpc>
-              <a:buNone/>
-            </a:pPr>
-            <a:r>
-              <a:rPr lang="en-US" sz="1570" dirty="0">
-                <a:solidFill>
-                  <a:srgbClr val="626262"/>
-                </a:solidFill>
-                <a:latin typeface="Inter" pitchFamily="34" charset="0"/>
-                <a:ea typeface="Inter" pitchFamily="34" charset="-122"/>
-                <a:cs typeface="Inter" pitchFamily="34" charset="-120"/>
-              </a:rPr>
-              <a:t>The human process, modelled. Reviews, sign-offs and conformity assessments are raised for the role that owns them, when they are due. Accountability becomes named work, not a policy document.</a:t>
-            </a:r>
-            <a:endParaRPr lang="en-US" sz="1570" dirty="0"/>
-          </a:p>
-        </p:txBody>
-      </p:sp>
-      <p:sp>
-        <p:nvSpPr>
-          <p:cNvPr id="8" name="Text 5"/>
-          <p:cNvSpPr/>
-          <p:nvPr/>
-        </p:nvSpPr>
-        <p:spPr>
-          <a:xfrm>
-            <a:off x="8006249" y="2122168"/>
-            <a:ext cx="3355229" cy="298307"/>
-          </a:xfrm>
-          <a:prstGeom prst="rect">
-            <a:avLst/>
-          </a:prstGeom>
-          <a:noFill/>
-          <a:ln/>
-        </p:spPr>
-        <p:txBody>
-          <a:bodyPr wrap="square" lIns="0" tIns="0" rIns="0" bIns="0" rtlCol="0" anchor="t"/>
-          <a:lstStyle/>
-          <a:p>
-            <a:pPr algn="l" indent="0" marL="0">
-              <a:lnSpc>
-                <a:spcPts val="2350"/>
-              </a:lnSpc>
-              <a:buNone/>
-            </a:pPr>
-            <a:r>
-              <a:rPr lang="en-US" sz="1570" b="1" dirty="0">
-                <a:solidFill>
-                  <a:srgbClr val="252525"/>
-                </a:solidFill>
-                <a:latin typeface="Inter" pitchFamily="34" charset="0"/>
-                <a:ea typeface="Inter" pitchFamily="34" charset="-122"/>
-                <a:cs typeface="Inter" pitchFamily="34" charset="-120"/>
-              </a:rPr>
-              <a:t>Agents</a:t>
-            </a:r>
-            <a:endParaRPr lang="en-US" sz="1570" dirty="0"/>
-          </a:p>
-        </p:txBody>
-      </p:sp>
-      <p:sp>
-        <p:nvSpPr>
-          <p:cNvPr id="9" name="Text 6"/>
-          <p:cNvSpPr/>
-          <p:nvPr/>
-        </p:nvSpPr>
-        <p:spPr>
-          <a:xfrm>
-            <a:off x="8006249" y="2489982"/>
-            <a:ext cx="3355229" cy="2684765"/>
-          </a:xfrm>
-          <a:prstGeom prst="rect">
-            <a:avLst/>
-          </a:prstGeom>
-          <a:noFill/>
-          <a:ln/>
-        </p:spPr>
-        <p:txBody>
-          <a:bodyPr wrap="square" lIns="0" tIns="0" rIns="0" bIns="0" rtlCol="0" anchor="t"/>
-          <a:lstStyle/>
-          <a:p>
-            <a:pPr algn="l" indent="0" marL="0">
-              <a:lnSpc>
-                <a:spcPts val="2350"/>
-              </a:lnSpc>
-              <a:buNone/>
-            </a:pPr>
-            <a:r>
-              <a:rPr lang="en-US" sz="1570" dirty="0">
-                <a:solidFill>
-                  <a:srgbClr val="626262"/>
-                </a:solidFill>
-                <a:latin typeface="Inter" pitchFamily="34" charset="0"/>
-                <a:ea typeface="Inter" pitchFamily="34" charset="-122"/>
-                <a:cs typeface="Inter" pitchFamily="34" charset="-120"/>
-              </a:rPr>
-              <a:t>Governance, Library and Docs MCP servers put the platform in front of any AI assistant. An agent registers the system from the deployment it sees, drafts the assessment, attaches evidence and opens the approval. 95% of the platform is operable over the REST API.</a:t>
-            </a:r>
-            <a:endParaRPr lang="en-US" sz="1570" dirty="0"/>
-          </a:p>
-        </p:txBody>
-      </p:sp>
-      <p:sp>
-        <p:nvSpPr>
-          <p:cNvPr id="10" name="Text 7"/>
-          <p:cNvSpPr/>
-          <p:nvPr/>
-        </p:nvSpPr>
-        <p:spPr>
-          <a:xfrm>
-            <a:off x="830521" y="5476162"/>
-            <a:ext cx="10530958" cy="494889"/>
-          </a:xfrm>
-          <a:prstGeom prst="rect">
-            <a:avLst/>
-          </a:prstGeom>
-          <a:noFill/>
-          <a:ln/>
-        </p:spPr>
-        <p:txBody>
-          <a:bodyPr wrap="square" lIns="0" tIns="0" rIns="0" bIns="0" rtlCol="0" anchor="t"/>
-          <a:lstStyle/>
-          <a:p>
-            <a:pPr algn="l" indent="0" marL="0">
-              <a:lnSpc>
-                <a:spcPts val="1950"/>
-              </a:lnSpc>
-              <a:buNone/>
-            </a:pPr>
-            <a:r>
-              <a:rPr lang="en-US" sz="1300" dirty="0">
-                <a:solidFill>
-                  <a:srgbClr val="626262"/>
-                </a:solidFill>
-                <a:latin typeface="Inter" pitchFamily="34" charset="0"/>
-                <a:ea typeface="Inter" pitchFamily="34" charset="-122"/>
-                <a:cs typeface="Inter" pitchFamily="34" charset="-120"/>
-              </a:rPr>
-              <a:t>The same three doors are how a delivery organisation embeds governance into client engagements without adding a manual step to each one.</a:t>
-            </a:r>
-            <a:endParaRPr lang="en-US" sz="1300" dirty="0"/>
+      <p:pic>
+        <p:nvPicPr>
+          <p:cNvPr id="3" name="Image 1" descr="preencoded.png">    </p:cNvPr>
+          <p:cNvPicPr>
+            <a:picLocks noChangeAspect="1"/>
+          </p:cNvPicPr>
+          <p:nvPr/>
+        </p:nvPicPr>
+        <p:blipFill>
+          <a:blip r:embed="rId2"/>
+          <a:stretch>
+            <a:fillRect/>
+          </a:stretch>
+        </p:blipFill>
+        <p:spPr>
+          <a:xfrm>
+            <a:off x="10942415" y="6363421"/>
+            <a:ext cx="914400" cy="234892"/>
+          </a:xfrm>
+          <a:prstGeom prst="rect">
+            <a:avLst/>
+          </a:prstGeom>
+        </p:spPr>
+      </p:pic>
+      <p:sp>
+        <p:nvSpPr>
+          <p:cNvPr id="4" name="Text 0"/>
+          <p:cNvSpPr/>
+          <p:nvPr/>
+        </p:nvSpPr>
+        <p:spPr>
+          <a:xfrm>
+            <a:off x="830520" y="931664"/>
+            <a:ext cx="10530959" cy="416272"/>
+          </a:xfrm>
+          <a:prstGeom prst="rect">
+            <a:avLst/>
+          </a:prstGeom>
+          <a:noFill/>
+          <a:ln/>
+        </p:spPr>
+        <p:txBody>
+          <a:bodyPr wrap="square" lIns="0" tIns="0" rIns="0" bIns="0" rtlCol="0" anchor="t"/>
+          <a:lstStyle/>
+          <a:p>
+            <a:pPr algn="l" indent="0" marL="0">
+              <a:lnSpc>
+                <a:spcPts val="3280"/>
+              </a:lnSpc>
+              <a:buNone/>
+            </a:pPr>
+            <a:r>
+              <a:rPr lang="en-US" sz="2980" dirty="0">
+                <a:solidFill>
+                  <a:srgbClr val="111318"/>
+                </a:solidFill>
+                <a:latin typeface="Libre Franklin" pitchFamily="34" charset="0"/>
+                <a:ea typeface="Libre Franklin" pitchFamily="34" charset="-122"/>
+                <a:cs typeface="Libre Franklin" pitchFamily="34" charset="-120"/>
+              </a:rPr>
+              <a:t>Enforcement stays in the runtime</a:t>
+            </a:r>
+            <a:endParaRPr lang="en-US" sz="2980" dirty="0"/>
+          </a:p>
+        </p:txBody>
+      </p:sp>
+      <p:sp>
+        <p:nvSpPr>
+          <p:cNvPr id="5" name="Text 1"/>
+          <p:cNvSpPr/>
+          <p:nvPr/>
+        </p:nvSpPr>
+        <p:spPr>
+          <a:xfrm>
+            <a:off x="830520" y="1439019"/>
+            <a:ext cx="10530959" cy="378619"/>
+          </a:xfrm>
+          <a:prstGeom prst="rect">
+            <a:avLst/>
+          </a:prstGeom>
+          <a:noFill/>
+          <a:ln/>
+        </p:spPr>
+        <p:txBody>
+          <a:bodyPr wrap="square" lIns="0" tIns="0" rIns="0" bIns="0" rtlCol="0" anchor="t"/>
+          <a:lstStyle/>
+          <a:p>
+            <a:pPr algn="l" indent="0" marL="0">
+              <a:lnSpc>
+                <a:spcPts val="1490"/>
+              </a:lnSpc>
+              <a:buNone/>
+            </a:pPr>
+            <a:r>
+              <a:rPr lang="en-US" sz="990" dirty="0">
+                <a:solidFill>
+                  <a:srgbClr val="111318"/>
+                </a:solidFill>
+                <a:latin typeface="Libre Franklin" pitchFamily="34" charset="0"/>
+                <a:ea typeface="Libre Franklin" pitchFamily="34" charset="-122"/>
+                <a:cs typeface="Libre Franklin" pitchFamily="34" charset="-120"/>
+              </a:rPr>
+              <a:t>Enforcement on platforms: largely solved; and the hot path is where it belongs.</a:t>
+            </a:r>
+            <a:pPr algn="l" indent="0" marL="0">
+              <a:lnSpc>
+                <a:spcPts val="1490"/>
+              </a:lnSpc>
+              <a:buNone/>
+            </a:pPr>
+            <a:r>
+              <a:rPr lang="en-US" sz="990" dirty="0">
+                <a:solidFill>
+                  <a:srgbClr val="111318"/>
+                </a:solidFill>
+                <a:latin typeface="Libre Franklin" pitchFamily="34" charset="0"/>
+                <a:ea typeface="Libre Franklin" pitchFamily="34" charset="-122"/>
+                <a:cs typeface="Libre Franklin" pitchFamily="34" charset="-120"/>
+              </a:rPr>
+              <a:t> What is missing sits at both ends: a control authored once, and the event that proves it held.</a:t>
+            </a:r>
+            <a:endParaRPr lang="en-US" sz="990" dirty="0"/>
+          </a:p>
+        </p:txBody>
+      </p:sp>
+      <p:sp>
+        <p:nvSpPr>
+          <p:cNvPr id="6" name="Text 2"/>
+          <p:cNvSpPr/>
+          <p:nvPr/>
+        </p:nvSpPr>
+        <p:spPr>
+          <a:xfrm>
+            <a:off x="830520" y="5547717"/>
+            <a:ext cx="10530959" cy="378619"/>
+          </a:xfrm>
+          <a:prstGeom prst="rect">
+            <a:avLst/>
+          </a:prstGeom>
+          <a:noFill/>
+          <a:ln/>
+        </p:spPr>
+        <p:txBody>
+          <a:bodyPr wrap="square" lIns="0" tIns="0" rIns="0" bIns="0" rtlCol="0" anchor="t"/>
+          <a:lstStyle/>
+          <a:p>
+            <a:pPr algn="l" indent="0" marL="0">
+              <a:lnSpc>
+                <a:spcPts val="1490"/>
+              </a:lnSpc>
+              <a:buNone/>
+            </a:pPr>
+            <a:r>
+              <a:rPr lang="en-US" sz="990" dirty="0">
+                <a:solidFill>
+                  <a:srgbClr val="111318"/>
+                </a:solidFill>
+                <a:latin typeface="Libre Franklin" pitchFamily="34" charset="0"/>
+                <a:ea typeface="Libre Franklin" pitchFamily="34" charset="-122"/>
+                <a:cs typeface="Libre Franklin" pitchFamily="34" charset="-120"/>
+              </a:rPr>
+              <a:t>Current: Your team writes the rule, as it does today. No new component sits between your agents and your models.</a:t>
+            </a:r>
+            <a:pPr algn="l" indent="0" marL="0">
+              <a:lnSpc>
+                <a:spcPts val="1490"/>
+              </a:lnSpc>
+              <a:buNone/>
+            </a:pPr>
+            <a:r>
+              <a:rPr lang="en-US" sz="990" dirty="0">
+                <a:solidFill>
+                  <a:srgbClr val="111318"/>
+                </a:solidFill>
+                <a:latin typeface="Libre Franklin" pitchFamily="34" charset="0"/>
+                <a:ea typeface="Libre Franklin" pitchFamily="34" charset="-122"/>
+                <a:cs typeface="Libre Franklin" pitchFamily="34" charset="-120"/>
+              </a:rPr>
+              <a:t> Planned: Working to automate or help creating rules.</a:t>
+            </a:r>
+            <a:endParaRPr lang="en-US" sz="990" dirty="0"/>
+          </a:p>
+        </p:txBody>
+      </p:sp>
+      <p:sp>
+        <p:nvSpPr>
+          <p:cNvPr id="7" name="Text 3"/>
+          <p:cNvSpPr/>
+          <p:nvPr/>
+        </p:nvSpPr>
+        <p:spPr>
+          <a:xfrm>
+            <a:off x="220920" y="6530429"/>
+            <a:ext cx="114627" cy="114300"/>
+          </a:xfrm>
+          <a:prstGeom prst="rect">
+            <a:avLst/>
+          </a:prstGeom>
+          <a:noFill/>
+          <a:ln/>
+        </p:spPr>
+        <p:txBody>
+          <a:bodyPr wrap="square" lIns="0" tIns="0" rIns="0" bIns="0" rtlCol="0" anchor="t"/>
+          <a:lstStyle/>
+          <a:p>
+            <a:pPr algn="l" indent="0" marL="0">
+              <a:lnSpc>
+                <a:spcPts val="900"/>
+              </a:lnSpc>
+              <a:buNone/>
+            </a:pPr>
+            <a:r>
+              <a:rPr lang="en-US" sz="900" dirty="0">
+                <a:solidFill>
+                  <a:srgbClr val="949597"/>
+                </a:solidFill>
+                <a:latin typeface="SF Mono" pitchFamily="34" charset="0"/>
+                <a:ea typeface="SF Mono" pitchFamily="34" charset="-122"/>
+                <a:cs typeface="SF Mono" pitchFamily="34" charset="-120"/>
+              </a:rPr>
+              <a:t>5</a:t>
+            </a:r>
+            <a:endParaRPr lang="en-US" sz="900" dirty="0"/>
           </a:p>
         </p:txBody>
       </p:sp>
@@ -2861,346 +3244,1887 @@
         <p:spPr>
           <a:xfrm>
             <a:off x="0" y="0"/>
-            <a:ext cx="12192000" cy="6857959"/>
+            <a:ext cx="12192000" cy="6858000"/>
           </a:xfrm>
           <a:prstGeom prst="rect">
             <a:avLst/>
           </a:prstGeom>
         </p:spPr>
       </p:pic>
-      <p:sp>
-        <p:nvSpPr>
-          <p:cNvPr id="3" name="Text 0"/>
-          <p:cNvSpPr/>
-          <p:nvPr/>
-        </p:nvSpPr>
-        <p:spPr>
-          <a:xfrm>
-            <a:off x="830521" y="885600"/>
-            <a:ext cx="10530958" cy="510262"/>
-          </a:xfrm>
-          <a:prstGeom prst="rect">
-            <a:avLst/>
-          </a:prstGeom>
-          <a:noFill/>
-          <a:ln/>
-        </p:spPr>
-        <p:txBody>
-          <a:bodyPr wrap="square" lIns="0" tIns="0" rIns="0" bIns="0" rtlCol="0" anchor="t"/>
-          <a:lstStyle/>
-          <a:p>
-            <a:pPr algn="l" indent="0" marL="0">
-              <a:lnSpc>
-                <a:spcPts val="4020"/>
-              </a:lnSpc>
-              <a:buNone/>
-            </a:pPr>
-            <a:r>
-              <a:rPr lang="en-US" sz="3590" dirty="0">
-                <a:solidFill>
-                  <a:srgbClr val="010101"/>
-                </a:solidFill>
-                <a:latin typeface="Copyright Peregrin Studio" pitchFamily="34" charset="0"/>
-                <a:ea typeface="Copyright Peregrin Studio" pitchFamily="34" charset="-122"/>
-                <a:cs typeface="Copyright Peregrin Studio" pitchFamily="34" charset="-120"/>
-              </a:rPr>
-              <a:t>Status and roadmap</a:t>
-            </a:r>
-            <a:endParaRPr lang="en-US" sz="3590" dirty="0"/>
-          </a:p>
-        </p:txBody>
-      </p:sp>
-      <p:sp>
-        <p:nvSpPr>
-          <p:cNvPr id="4" name="Text 1"/>
-          <p:cNvSpPr/>
-          <p:nvPr/>
-        </p:nvSpPr>
-        <p:spPr>
-          <a:xfrm>
-            <a:off x="1060466" y="2098781"/>
-            <a:ext cx="2879966" cy="274430"/>
-          </a:xfrm>
-          <a:prstGeom prst="rect">
-            <a:avLst/>
-          </a:prstGeom>
-          <a:noFill/>
-          <a:ln/>
-        </p:spPr>
-        <p:txBody>
-          <a:bodyPr wrap="square" lIns="0" tIns="0" rIns="0" bIns="0" rtlCol="0" anchor="t"/>
-          <a:lstStyle/>
-          <a:p>
-            <a:pPr algn="l" indent="0" marL="0">
-              <a:lnSpc>
-                <a:spcPts val="2160"/>
-              </a:lnSpc>
-              <a:buNone/>
-            </a:pPr>
-            <a:r>
-              <a:rPr lang="en-US" sz="1440" b="1" dirty="0">
+      <p:pic>
+        <p:nvPicPr>
+          <p:cNvPr id="3" name="Image 1" descr="preencoded.png">    </p:cNvPr>
+          <p:cNvPicPr>
+            <a:picLocks noChangeAspect="1"/>
+          </p:cNvPicPr>
+          <p:nvPr/>
+        </p:nvPicPr>
+        <p:blipFill>
+          <a:blip r:embed="rId2"/>
+          <a:stretch>
+            <a:fillRect/>
+          </a:stretch>
+        </p:blipFill>
+        <p:spPr>
+          <a:xfrm>
+            <a:off x="10942415" y="6363421"/>
+            <a:ext cx="914400" cy="234892"/>
+          </a:xfrm>
+          <a:prstGeom prst="rect">
+            <a:avLst/>
+          </a:prstGeom>
+        </p:spPr>
+      </p:pic>
+      <p:sp>
+        <p:nvSpPr>
+          <p:cNvPr id="4" name="Text 0"/>
+          <p:cNvSpPr/>
+          <p:nvPr/>
+        </p:nvSpPr>
+        <p:spPr>
+          <a:xfrm>
+            <a:off x="830520" y="1344216"/>
+            <a:ext cx="10530959" cy="436066"/>
+          </a:xfrm>
+          <a:prstGeom prst="rect">
+            <a:avLst/>
+          </a:prstGeom>
+          <a:noFill/>
+          <a:ln/>
+        </p:spPr>
+        <p:txBody>
+          <a:bodyPr wrap="square" lIns="0" tIns="0" rIns="0" bIns="0" rtlCol="0" anchor="t"/>
+          <a:lstStyle/>
+          <a:p>
+            <a:pPr algn="l" indent="0" marL="0">
+              <a:lnSpc>
+                <a:spcPts val="3430"/>
+              </a:lnSpc>
+              <a:buNone/>
+            </a:pPr>
+            <a:r>
+              <a:rPr lang="en-US" sz="3120" dirty="0">
+                <a:solidFill>
+                  <a:srgbClr val="111318"/>
+                </a:solidFill>
+                <a:latin typeface="Libre Franklin" pitchFamily="34" charset="0"/>
+                <a:ea typeface="Libre Franklin" pitchFamily="34" charset="-122"/>
+                <a:cs typeface="Libre Franklin" pitchFamily="34" charset="-120"/>
+              </a:rPr>
+              <a:t>How a decision travels</a:t>
+            </a:r>
+            <a:endParaRPr lang="en-US" sz="3120" dirty="0"/>
+          </a:p>
+        </p:txBody>
+      </p:sp>
+      <p:sp>
+        <p:nvSpPr>
+          <p:cNvPr id="5" name="Text 1"/>
+          <p:cNvSpPr/>
+          <p:nvPr/>
+        </p:nvSpPr>
+        <p:spPr>
+          <a:xfrm>
+            <a:off x="830520" y="2557909"/>
+            <a:ext cx="1564660" cy="238869"/>
+          </a:xfrm>
+          <a:prstGeom prst="rect">
+            <a:avLst/>
+          </a:prstGeom>
+          <a:noFill/>
+          <a:ln/>
+        </p:spPr>
+        <p:txBody>
+          <a:bodyPr wrap="square" lIns="0" tIns="0" rIns="0" bIns="0" rtlCol="0" anchor="t"/>
+          <a:lstStyle/>
+          <a:p>
+            <a:pPr algn="l" indent="0" marL="0">
+              <a:lnSpc>
+                <a:spcPts val="1880"/>
+              </a:lnSpc>
+              <a:buNone/>
+            </a:pPr>
+            <a:r>
+              <a:rPr lang="en-US" sz="1250" b="1" dirty="0">
+                <a:solidFill>
+                  <a:srgbClr val="111318"/>
+                </a:solidFill>
+                <a:latin typeface="Libre Franklin" pitchFamily="34" charset="0"/>
+                <a:ea typeface="Libre Franklin" pitchFamily="34" charset="-122"/>
+                <a:cs typeface="Libre Franklin" pitchFamily="34" charset="-120"/>
+              </a:rPr>
+              <a:t>Register</a:t>
+            </a:r>
+            <a:endParaRPr lang="en-US" sz="1250" dirty="0"/>
+          </a:p>
+        </p:txBody>
+      </p:sp>
+      <p:sp>
+        <p:nvSpPr>
+          <p:cNvPr id="6" name="Text 2"/>
+          <p:cNvSpPr/>
+          <p:nvPr/>
+        </p:nvSpPr>
+        <p:spPr>
+          <a:xfrm>
+            <a:off x="830520" y="2844552"/>
+            <a:ext cx="1564660" cy="1318022"/>
+          </a:xfrm>
+          <a:prstGeom prst="rect">
+            <a:avLst/>
+          </a:prstGeom>
+          <a:noFill/>
+          <a:ln/>
+        </p:spPr>
+        <p:txBody>
+          <a:bodyPr wrap="square" lIns="0" tIns="0" rIns="0" bIns="0" rtlCol="0" anchor="t"/>
+          <a:lstStyle/>
+          <a:p>
+            <a:pPr algn="l" indent="0" marL="0">
+              <a:lnSpc>
+                <a:spcPts val="1730"/>
+              </a:lnSpc>
+              <a:buNone/>
+            </a:pPr>
+            <a:r>
+              <a:rPr lang="en-US" sz="1150" dirty="0">
+                <a:solidFill>
+                  <a:srgbClr val="5B6270"/>
+                </a:solidFill>
+                <a:latin typeface="Libre Franklin" pitchFamily="34" charset="0"/>
+                <a:ea typeface="Libre Franklin" pitchFamily="34" charset="-122"/>
+                <a:cs typeface="Libre Franklin" pitchFamily="34" charset="-120"/>
+              </a:rPr>
+              <a:t>Systems, models, agents, datasets and tools land in one graph, by hand, by connector, or by an agent over MCP.</a:t>
+            </a:r>
+            <a:endParaRPr lang="en-US" sz="1150" dirty="0"/>
+          </a:p>
+        </p:txBody>
+      </p:sp>
+      <p:sp>
+        <p:nvSpPr>
+          <p:cNvPr id="7" name="Text 3"/>
+          <p:cNvSpPr/>
+          <p:nvPr/>
+        </p:nvSpPr>
+        <p:spPr>
+          <a:xfrm>
+            <a:off x="2623751" y="2557909"/>
+            <a:ext cx="1564660" cy="238869"/>
+          </a:xfrm>
+          <a:prstGeom prst="rect">
+            <a:avLst/>
+          </a:prstGeom>
+          <a:noFill/>
+          <a:ln/>
+        </p:spPr>
+        <p:txBody>
+          <a:bodyPr wrap="square" lIns="0" tIns="0" rIns="0" bIns="0" rtlCol="0" anchor="t"/>
+          <a:lstStyle/>
+          <a:p>
+            <a:pPr algn="l" indent="0" marL="0">
+              <a:lnSpc>
+                <a:spcPts val="1880"/>
+              </a:lnSpc>
+              <a:buNone/>
+            </a:pPr>
+            <a:r>
+              <a:rPr lang="en-US" sz="1250" b="1" dirty="0">
+                <a:solidFill>
+                  <a:srgbClr val="111318"/>
+                </a:solidFill>
+                <a:latin typeface="Libre Franklin" pitchFamily="34" charset="0"/>
+                <a:ea typeface="Libre Franklin" pitchFamily="34" charset="-122"/>
+                <a:cs typeface="Libre Franklin" pitchFamily="34" charset="-120"/>
+              </a:rPr>
+              <a:t>Classify</a:t>
+            </a:r>
+            <a:endParaRPr lang="en-US" sz="1250" dirty="0"/>
+          </a:p>
+        </p:txBody>
+      </p:sp>
+      <p:sp>
+        <p:nvSpPr>
+          <p:cNvPr id="8" name="Text 4"/>
+          <p:cNvSpPr/>
+          <p:nvPr/>
+        </p:nvSpPr>
+        <p:spPr>
+          <a:xfrm>
+            <a:off x="2623751" y="2844552"/>
+            <a:ext cx="1564660" cy="1098352"/>
+          </a:xfrm>
+          <a:prstGeom prst="rect">
+            <a:avLst/>
+          </a:prstGeom>
+          <a:noFill/>
+          <a:ln/>
+        </p:spPr>
+        <p:txBody>
+          <a:bodyPr wrap="square" lIns="0" tIns="0" rIns="0" bIns="0" rtlCol="0" anchor="t"/>
+          <a:lstStyle/>
+          <a:p>
+            <a:pPr algn="l" indent="0" marL="0">
+              <a:lnSpc>
+                <a:spcPts val="1730"/>
+              </a:lnSpc>
+              <a:buNone/>
+            </a:pPr>
+            <a:r>
+              <a:rPr lang="en-US" sz="1150" dirty="0">
+                <a:solidFill>
+                  <a:srgbClr val="5B6270"/>
+                </a:solidFill>
+                <a:latin typeface="Libre Franklin" pitchFamily="34" charset="0"/>
+                <a:ea typeface="Libre Franklin" pitchFamily="34" charset="-122"/>
+                <a:cs typeface="Libre Franklin" pitchFamily="34" charset="-120"/>
+              </a:rPr>
+              <a:t>Rules read the metadata, region, use, linked components, and set the tier. A person ratifies it.</a:t>
+            </a:r>
+            <a:endParaRPr lang="en-US" sz="1150" dirty="0"/>
+          </a:p>
+        </p:txBody>
+      </p:sp>
+      <p:sp>
+        <p:nvSpPr>
+          <p:cNvPr id="9" name="Text 5"/>
+          <p:cNvSpPr/>
+          <p:nvPr/>
+        </p:nvSpPr>
+        <p:spPr>
+          <a:xfrm>
+            <a:off x="4416981" y="2557909"/>
+            <a:ext cx="1564660" cy="238869"/>
+          </a:xfrm>
+          <a:prstGeom prst="rect">
+            <a:avLst/>
+          </a:prstGeom>
+          <a:noFill/>
+          <a:ln/>
+        </p:spPr>
+        <p:txBody>
+          <a:bodyPr wrap="square" lIns="0" tIns="0" rIns="0" bIns="0" rtlCol="0" anchor="t"/>
+          <a:lstStyle/>
+          <a:p>
+            <a:pPr algn="l" indent="0" marL="0">
+              <a:lnSpc>
+                <a:spcPts val="1880"/>
+              </a:lnSpc>
+              <a:buNone/>
+            </a:pPr>
+            <a:r>
+              <a:rPr lang="en-US" sz="1250" b="1" dirty="0">
+                <a:solidFill>
+                  <a:srgbClr val="111318"/>
+                </a:solidFill>
+                <a:latin typeface="Libre Franklin" pitchFamily="34" charset="0"/>
+                <a:ea typeface="Libre Franklin" pitchFamily="34" charset="-122"/>
+                <a:cs typeface="Libre Franklin" pitchFamily="34" charset="-120"/>
+              </a:rPr>
+              <a:t>Map</a:t>
+            </a:r>
+            <a:endParaRPr lang="en-US" sz="1250" dirty="0"/>
+          </a:p>
+        </p:txBody>
+      </p:sp>
+      <p:sp>
+        <p:nvSpPr>
+          <p:cNvPr id="10" name="Text 6"/>
+          <p:cNvSpPr/>
+          <p:nvPr/>
+        </p:nvSpPr>
+        <p:spPr>
+          <a:xfrm>
+            <a:off x="4416981" y="2844552"/>
+            <a:ext cx="1564660" cy="2196703"/>
+          </a:xfrm>
+          <a:prstGeom prst="rect">
+            <a:avLst/>
+          </a:prstGeom>
+          <a:noFill/>
+          <a:ln/>
+        </p:spPr>
+        <p:txBody>
+          <a:bodyPr wrap="square" lIns="0" tIns="0" rIns="0" bIns="0" rtlCol="0" anchor="t"/>
+          <a:lstStyle/>
+          <a:p>
+            <a:pPr algn="l" indent="0" marL="0">
+              <a:lnSpc>
+                <a:spcPts val="1730"/>
+              </a:lnSpc>
+              <a:buNone/>
+            </a:pPr>
+            <a:r>
+              <a:rPr lang="en-US" sz="1150" dirty="0">
+                <a:solidFill>
+                  <a:srgbClr val="5B6270"/>
+                </a:solidFill>
+                <a:latin typeface="Libre Franklin" pitchFamily="34" charset="0"/>
+                <a:ea typeface="Libre Franklin" pitchFamily="34" charset="-122"/>
+                <a:cs typeface="Libre Franklin" pitchFamily="34" charset="-120"/>
+              </a:rPr>
+              <a:t>The tier and the linked risks resolve the control set through the graph. Each control is itemised, carrying its scope, its recurrence, the evidence it requires and its links, all readable over the API.</a:t>
+            </a:r>
+            <a:endParaRPr lang="en-US" sz="1150" dirty="0"/>
+          </a:p>
+        </p:txBody>
+      </p:sp>
+      <p:sp>
+        <p:nvSpPr>
+          <p:cNvPr id="11" name="Text 7"/>
+          <p:cNvSpPr/>
+          <p:nvPr/>
+        </p:nvSpPr>
+        <p:spPr>
+          <a:xfrm>
+            <a:off x="6210211" y="2557909"/>
+            <a:ext cx="1564660" cy="238869"/>
+          </a:xfrm>
+          <a:prstGeom prst="rect">
+            <a:avLst/>
+          </a:prstGeom>
+          <a:noFill/>
+          <a:ln/>
+        </p:spPr>
+        <p:txBody>
+          <a:bodyPr wrap="square" lIns="0" tIns="0" rIns="0" bIns="0" rtlCol="0" anchor="t"/>
+          <a:lstStyle/>
+          <a:p>
+            <a:pPr algn="l" indent="0" marL="0">
+              <a:lnSpc>
+                <a:spcPts val="1880"/>
+              </a:lnSpc>
+              <a:buNone/>
+            </a:pPr>
+            <a:r>
+              <a:rPr lang="en-US" sz="1250" b="1" dirty="0">
+                <a:solidFill>
+                  <a:srgbClr val="111318"/>
+                </a:solidFill>
+                <a:latin typeface="Libre Franklin" pitchFamily="34" charset="0"/>
+                <a:ea typeface="Libre Franklin" pitchFamily="34" charset="-122"/>
+                <a:cs typeface="Libre Franklin" pitchFamily="34" charset="-120"/>
+              </a:rPr>
+              <a:t>Assign</a:t>
+            </a:r>
+            <a:endParaRPr lang="en-US" sz="1250" dirty="0"/>
+          </a:p>
+        </p:txBody>
+      </p:sp>
+      <p:sp>
+        <p:nvSpPr>
+          <p:cNvPr id="12" name="Text 8"/>
+          <p:cNvSpPr/>
+          <p:nvPr/>
+        </p:nvSpPr>
+        <p:spPr>
+          <a:xfrm>
+            <a:off x="6210211" y="2844552"/>
+            <a:ext cx="1564660" cy="1537692"/>
+          </a:xfrm>
+          <a:prstGeom prst="rect">
+            <a:avLst/>
+          </a:prstGeom>
+          <a:noFill/>
+          <a:ln/>
+        </p:spPr>
+        <p:txBody>
+          <a:bodyPr wrap="square" lIns="0" tIns="0" rIns="0" bIns="0" rtlCol="0" anchor="t"/>
+          <a:lstStyle/>
+          <a:p>
+            <a:pPr algn="l" indent="0" marL="0">
+              <a:lnSpc>
+                <a:spcPts val="1730"/>
+              </a:lnSpc>
+              <a:buNone/>
+            </a:pPr>
+            <a:r>
+              <a:rPr lang="en-US" sz="1150" dirty="0">
+                <a:solidFill>
+                  <a:srgbClr val="5B6270"/>
+                </a:solidFill>
+                <a:latin typeface="Libre Franklin" pitchFamily="34" charset="0"/>
+                <a:ea typeface="Libre Franklin" pitchFamily="34" charset="-122"/>
+                <a:cs typeface="Libre Franklin" pitchFamily="34" charset="-120"/>
+              </a:rPr>
+              <a:t>Each control gets an owner and a due date. Lifecycle stages gate on approval, and a review goes to a named reviewer, internal or external.</a:t>
+            </a:r>
+            <a:endParaRPr lang="en-US" sz="1150" dirty="0"/>
+          </a:p>
+        </p:txBody>
+      </p:sp>
+      <p:sp>
+        <p:nvSpPr>
+          <p:cNvPr id="13" name="Text 9"/>
+          <p:cNvSpPr/>
+          <p:nvPr/>
+        </p:nvSpPr>
+        <p:spPr>
+          <a:xfrm>
+            <a:off x="8003441" y="2557909"/>
+            <a:ext cx="1564660" cy="238869"/>
+          </a:xfrm>
+          <a:prstGeom prst="rect">
+            <a:avLst/>
+          </a:prstGeom>
+          <a:noFill/>
+          <a:ln/>
+        </p:spPr>
+        <p:txBody>
+          <a:bodyPr wrap="square" lIns="0" tIns="0" rIns="0" bIns="0" rtlCol="0" anchor="t"/>
+          <a:lstStyle/>
+          <a:p>
+            <a:pPr algn="l" indent="0" marL="0">
+              <a:lnSpc>
+                <a:spcPts val="1880"/>
+              </a:lnSpc>
+              <a:buNone/>
+            </a:pPr>
+            <a:r>
+              <a:rPr lang="en-US" sz="1250" b="1" dirty="0">
+                <a:solidFill>
+                  <a:srgbClr val="111318"/>
+                </a:solidFill>
+                <a:latin typeface="Libre Franklin" pitchFamily="34" charset="0"/>
+                <a:ea typeface="Libre Franklin" pitchFamily="34" charset="-122"/>
+                <a:cs typeface="Libre Franklin" pitchFamily="34" charset="-120"/>
+              </a:rPr>
+              <a:t>Evidence</a:t>
+            </a:r>
+            <a:endParaRPr lang="en-US" sz="1250" dirty="0"/>
+          </a:p>
+        </p:txBody>
+      </p:sp>
+      <p:sp>
+        <p:nvSpPr>
+          <p:cNvPr id="14" name="Text 10"/>
+          <p:cNvSpPr/>
+          <p:nvPr/>
+        </p:nvSpPr>
+        <p:spPr>
+          <a:xfrm>
+            <a:off x="8003441" y="2844552"/>
+            <a:ext cx="1564660" cy="1537692"/>
+          </a:xfrm>
+          <a:prstGeom prst="rect">
+            <a:avLst/>
+          </a:prstGeom>
+          <a:noFill/>
+          <a:ln/>
+        </p:spPr>
+        <p:txBody>
+          <a:bodyPr wrap="square" lIns="0" tIns="0" rIns="0" bIns="0" rtlCol="0" anchor="t"/>
+          <a:lstStyle/>
+          <a:p>
+            <a:pPr algn="l" indent="0" marL="0">
+              <a:lnSpc>
+                <a:spcPts val="1730"/>
+              </a:lnSpc>
+              <a:buNone/>
+            </a:pPr>
+            <a:r>
+              <a:rPr lang="en-US" sz="1150" dirty="0">
+                <a:solidFill>
+                  <a:srgbClr val="5B6270"/>
+                </a:solidFill>
+                <a:latin typeface="Libre Franklin" pitchFamily="34" charset="0"/>
+                <a:ea typeface="Libre Franklin" pitchFamily="34" charset="-122"/>
+                <a:cs typeface="Libre Franklin" pitchFamily="34" charset="-120"/>
+              </a:rPr>
+              <a:t>Observability events come back from the runtime and attach to the control. An event can open an incident, a review or a reclassification.</a:t>
+            </a:r>
+            <a:endParaRPr lang="en-US" sz="1150" dirty="0"/>
+          </a:p>
+        </p:txBody>
+      </p:sp>
+      <p:sp>
+        <p:nvSpPr>
+          <p:cNvPr id="15" name="Text 11"/>
+          <p:cNvSpPr/>
+          <p:nvPr/>
+        </p:nvSpPr>
+        <p:spPr>
+          <a:xfrm>
+            <a:off x="9796671" y="2557909"/>
+            <a:ext cx="1564809" cy="238869"/>
+          </a:xfrm>
+          <a:prstGeom prst="rect">
+            <a:avLst/>
+          </a:prstGeom>
+          <a:noFill/>
+          <a:ln/>
+        </p:spPr>
+        <p:txBody>
+          <a:bodyPr wrap="square" lIns="0" tIns="0" rIns="0" bIns="0" rtlCol="0" anchor="t"/>
+          <a:lstStyle/>
+          <a:p>
+            <a:pPr algn="l" indent="0" marL="0">
+              <a:lnSpc>
+                <a:spcPts val="1880"/>
+              </a:lnSpc>
+              <a:buNone/>
+            </a:pPr>
+            <a:r>
+              <a:rPr lang="en-US" sz="1250" b="1" dirty="0">
+                <a:solidFill>
+                  <a:srgbClr val="111318"/>
+                </a:solidFill>
+                <a:latin typeface="Libre Franklin" pitchFamily="34" charset="0"/>
+                <a:ea typeface="Libre Franklin" pitchFamily="34" charset="-122"/>
+                <a:cs typeface="Libre Franklin" pitchFamily="34" charset="-120"/>
+              </a:rPr>
+              <a:t>Report</a:t>
+            </a:r>
+            <a:endParaRPr lang="en-US" sz="1250" dirty="0"/>
+          </a:p>
+        </p:txBody>
+      </p:sp>
+      <p:sp>
+        <p:nvSpPr>
+          <p:cNvPr id="16" name="Text 12"/>
+          <p:cNvSpPr/>
+          <p:nvPr/>
+        </p:nvSpPr>
+        <p:spPr>
+          <a:xfrm>
+            <a:off x="9796671" y="2844552"/>
+            <a:ext cx="1564809" cy="1318022"/>
+          </a:xfrm>
+          <a:prstGeom prst="rect">
+            <a:avLst/>
+          </a:prstGeom>
+          <a:noFill/>
+          <a:ln/>
+        </p:spPr>
+        <p:txBody>
+          <a:bodyPr wrap="square" lIns="0" tIns="0" rIns="0" bIns="0" rtlCol="0" anchor="t"/>
+          <a:lstStyle/>
+          <a:p>
+            <a:pPr algn="l" indent="0" marL="0">
+              <a:lnSpc>
+                <a:spcPts val="1730"/>
+              </a:lnSpc>
+              <a:buNone/>
+            </a:pPr>
+            <a:r>
+              <a:rPr lang="en-US" sz="1150" dirty="0">
+                <a:solidFill>
+                  <a:srgbClr val="5B6270"/>
+                </a:solidFill>
+                <a:latin typeface="Libre Franklin" pitchFamily="34" charset="0"/>
+                <a:ea typeface="Libre Franklin" pitchFamily="34" charset="-122"/>
+                <a:cs typeface="Libre Franklin" pitchFamily="34" charset="-120"/>
+              </a:rPr>
+              <a:t>Reviews and transparency reports are generated from the record, current on the day they are asked for.</a:t>
+            </a:r>
+            <a:endParaRPr lang="en-US" sz="1150" dirty="0"/>
+          </a:p>
+        </p:txBody>
+      </p:sp>
+      <p:sp>
+        <p:nvSpPr>
+          <p:cNvPr id="17" name="Text 13"/>
+          <p:cNvSpPr/>
+          <p:nvPr/>
+        </p:nvSpPr>
+        <p:spPr>
+          <a:xfrm>
+            <a:off x="830520" y="5315545"/>
+            <a:ext cx="10530959" cy="198239"/>
+          </a:xfrm>
+          <a:prstGeom prst="rect">
+            <a:avLst/>
+          </a:prstGeom>
+          <a:noFill/>
+          <a:ln/>
+        </p:spPr>
+        <p:txBody>
+          <a:bodyPr wrap="square" lIns="0" tIns="0" rIns="0" bIns="0" rtlCol="0" anchor="t"/>
+          <a:lstStyle/>
+          <a:p>
+            <a:pPr algn="l" indent="0" marL="0">
+              <a:lnSpc>
+                <a:spcPts val="1560"/>
+              </a:lnSpc>
+              <a:buNone/>
+            </a:pPr>
+            <a:r>
+              <a:rPr lang="en-US" sz="1040" dirty="0">
+                <a:solidFill>
+                  <a:srgbClr val="5B6270"/>
+                </a:solidFill>
+                <a:latin typeface="Libre Franklin" pitchFamily="34" charset="0"/>
+                <a:ea typeface="Libre Franklin" pitchFamily="34" charset="-122"/>
+                <a:cs typeface="Libre Franklin" pitchFamily="34" charset="-120"/>
+              </a:rPr>
+              <a:t>Registering, classifying and mapping run through the MCP servers as well, so a client's own agents can operate the loop.</a:t>
+            </a:r>
+            <a:endParaRPr lang="en-US" sz="1040" dirty="0"/>
+          </a:p>
+        </p:txBody>
+      </p:sp>
+      <p:sp>
+        <p:nvSpPr>
+          <p:cNvPr id="18" name="Text 14"/>
+          <p:cNvSpPr/>
+          <p:nvPr/>
+        </p:nvSpPr>
+        <p:spPr>
+          <a:xfrm>
+            <a:off x="220920" y="6530429"/>
+            <a:ext cx="114627" cy="114300"/>
+          </a:xfrm>
+          <a:prstGeom prst="rect">
+            <a:avLst/>
+          </a:prstGeom>
+          <a:noFill/>
+          <a:ln/>
+        </p:spPr>
+        <p:txBody>
+          <a:bodyPr wrap="square" lIns="0" tIns="0" rIns="0" bIns="0" rtlCol="0" anchor="t"/>
+          <a:lstStyle/>
+          <a:p>
+            <a:pPr algn="l" indent="0" marL="0">
+              <a:lnSpc>
+                <a:spcPts val="900"/>
+              </a:lnSpc>
+              <a:buNone/>
+            </a:pPr>
+            <a:r>
+              <a:rPr lang="en-US" sz="900" dirty="0">
+                <a:solidFill>
+                  <a:srgbClr val="949597"/>
+                </a:solidFill>
+                <a:latin typeface="SF Mono" pitchFamily="34" charset="0"/>
+                <a:ea typeface="SF Mono" pitchFamily="34" charset="-122"/>
+                <a:cs typeface="SF Mono" pitchFamily="34" charset="-120"/>
+              </a:rPr>
+              <a:t>6</a:t>
+            </a:r>
+            <a:endParaRPr lang="en-US" sz="900" dirty="0"/>
+          </a:p>
+        </p:txBody>
+      </p:sp>
+    </p:spTree>
+  </p:cSld>
+  <p:clrMapOvr>
+    <a:masterClrMapping/>
+  </p:clrMapOvr>
+</p:sld>
+</file>
+
+<file path=ppt/slides/slide7.xml><?xml version="1.0" encoding="utf-8"?>
+<p:sld xmlns:a="http://schemas.openxmlformats.org/drawingml/2006/main" xmlns:r="http://schemas.openxmlformats.org/officeDocument/2006/relationships" xmlns:p="http://schemas.openxmlformats.org/presentationml/2006/main">
+  <p:cSld name="Slide 7">
+    <p:spTree>
+      <p:nvGrpSpPr>
+        <p:cNvPr id="1" name=""/>
+        <p:cNvGrpSpPr/>
+        <p:nvPr/>
+      </p:nvGrpSpPr>
+      <p:grpSpPr>
+        <a:xfrm>
+          <a:off x="0" y="0"/>
+          <a:ext cx="0" cy="0"/>
+          <a:chOff x="0" y="0"/>
+          <a:chExt cx="0" cy="0"/>
+        </a:xfrm>
+      </p:grpSpPr>
+      <p:pic>
+        <p:nvPicPr>
+          <p:cNvPr id="2" name="Image 0" descr="preencoded.png">    </p:cNvPr>
+          <p:cNvPicPr>
+            <a:picLocks noChangeAspect="1"/>
+          </p:cNvPicPr>
+          <p:nvPr/>
+        </p:nvPicPr>
+        <p:blipFill>
+          <a:blip r:embed="rId1"/>
+          <a:stretch>
+            <a:fillRect/>
+          </a:stretch>
+        </p:blipFill>
+        <p:spPr>
+          <a:xfrm>
+            <a:off x="0" y="0"/>
+            <a:ext cx="12192000" cy="6858000"/>
+          </a:xfrm>
+          <a:prstGeom prst="rect">
+            <a:avLst/>
+          </a:prstGeom>
+        </p:spPr>
+      </p:pic>
+      <p:pic>
+        <p:nvPicPr>
+          <p:cNvPr id="3" name="Image 1" descr="preencoded.png">    </p:cNvPr>
+          <p:cNvPicPr>
+            <a:picLocks noChangeAspect="1"/>
+          </p:cNvPicPr>
+          <p:nvPr/>
+        </p:nvPicPr>
+        <p:blipFill>
+          <a:blip r:embed="rId2"/>
+          <a:stretch>
+            <a:fillRect/>
+          </a:stretch>
+        </p:blipFill>
+        <p:spPr>
+          <a:xfrm>
+            <a:off x="10942415" y="6363421"/>
+            <a:ext cx="914400" cy="234892"/>
+          </a:xfrm>
+          <a:prstGeom prst="rect">
+            <a:avLst/>
+          </a:prstGeom>
+        </p:spPr>
+      </p:pic>
+      <p:sp>
+        <p:nvSpPr>
+          <p:cNvPr id="4" name="Text 0"/>
+          <p:cNvSpPr/>
+          <p:nvPr/>
+        </p:nvSpPr>
+        <p:spPr>
+          <a:xfrm>
+            <a:off x="830520" y="1088975"/>
+            <a:ext cx="10530959" cy="495598"/>
+          </a:xfrm>
+          <a:prstGeom prst="rect">
+            <a:avLst/>
+          </a:prstGeom>
+          <a:noFill/>
+          <a:ln/>
+        </p:spPr>
+        <p:txBody>
+          <a:bodyPr wrap="square" lIns="0" tIns="0" rIns="0" bIns="0" rtlCol="0" anchor="t"/>
+          <a:lstStyle/>
+          <a:p>
+            <a:pPr algn="l" indent="0" marL="0">
+              <a:lnSpc>
+                <a:spcPts val="3900"/>
+              </a:lnSpc>
+              <a:buNone/>
+            </a:pPr>
+            <a:r>
+              <a:rPr lang="en-US" sz="3550" dirty="0">
+                <a:solidFill>
+                  <a:srgbClr val="111318"/>
+                </a:solidFill>
+                <a:latin typeface="Libre Franklin" pitchFamily="34" charset="0"/>
+                <a:ea typeface="Libre Franklin" pitchFamily="34" charset="-122"/>
+                <a:cs typeface="Libre Franklin" pitchFamily="34" charset="-120"/>
+              </a:rPr>
+              <a:t>Your governance model, configured</a:t>
+            </a:r>
+            <a:endParaRPr lang="en-US" sz="3550" dirty="0"/>
+          </a:p>
+        </p:txBody>
+      </p:sp>
+      <p:sp>
+        <p:nvSpPr>
+          <p:cNvPr id="5" name="Text 1"/>
+          <p:cNvSpPr/>
+          <p:nvPr/>
+        </p:nvSpPr>
+        <p:spPr>
+          <a:xfrm>
+            <a:off x="830520" y="2095351"/>
+            <a:ext cx="391894" cy="289620"/>
+          </a:xfrm>
+          <a:prstGeom prst="rect">
+            <a:avLst/>
+          </a:prstGeom>
+          <a:noFill/>
+          <a:ln/>
+        </p:spPr>
+        <p:txBody>
+          <a:bodyPr wrap="square" lIns="0" tIns="0" rIns="0" bIns="0" rtlCol="0" anchor="t"/>
+          <a:lstStyle/>
+          <a:p>
+            <a:pPr algn="l" indent="0" marL="0">
+              <a:lnSpc>
+                <a:spcPts val="2280"/>
+              </a:lnSpc>
+              <a:buNone/>
+            </a:pPr>
+            <a:r>
+              <a:rPr lang="en-US" sz="2280" b="1" dirty="0">
+                <a:solidFill>
+                  <a:srgbClr val="3653E0"/>
+                </a:solidFill>
+                <a:latin typeface="Libre Franklin" pitchFamily="34" charset="0"/>
+                <a:ea typeface="Libre Franklin" pitchFamily="34" charset="-122"/>
+                <a:cs typeface="Libre Franklin" pitchFamily="34" charset="-120"/>
+              </a:rPr>
+              <a:t>01</a:t>
+            </a:r>
+            <a:endParaRPr lang="en-US" sz="2280" dirty="0"/>
+          </a:p>
+        </p:txBody>
+      </p:sp>
+      <p:sp>
+        <p:nvSpPr>
+          <p:cNvPr id="6" name="Text 2"/>
+          <p:cNvSpPr/>
+          <p:nvPr/>
+        </p:nvSpPr>
+        <p:spPr>
+          <a:xfrm>
+            <a:off x="1393835" y="2152501"/>
+            <a:ext cx="2157889" cy="271463"/>
+          </a:xfrm>
+          <a:prstGeom prst="rect">
+            <a:avLst/>
+          </a:prstGeom>
+          <a:noFill/>
+          <a:ln/>
+        </p:spPr>
+        <p:txBody>
+          <a:bodyPr wrap="square" lIns="0" tIns="0" rIns="0" bIns="0" rtlCol="0" anchor="t"/>
+          <a:lstStyle/>
+          <a:p>
+            <a:pPr algn="l" indent="0" marL="0">
+              <a:lnSpc>
+                <a:spcPts val="2140"/>
+              </a:lnSpc>
+              <a:buNone/>
+            </a:pPr>
+            <a:r>
+              <a:rPr lang="en-US" sz="1430" b="1" dirty="0">
+                <a:solidFill>
+                  <a:srgbClr val="111318"/>
+                </a:solidFill>
+                <a:latin typeface="Libre Franklin" pitchFamily="34" charset="0"/>
+                <a:ea typeface="Libre Franklin" pitchFamily="34" charset="-122"/>
+                <a:cs typeface="Libre Franklin" pitchFamily="34" charset="-120"/>
+              </a:rPr>
+              <a:t>Your controls, as entities</a:t>
+            </a:r>
+            <a:endParaRPr lang="en-US" sz="1430" dirty="0"/>
+          </a:p>
+        </p:txBody>
+      </p:sp>
+      <p:sp>
+        <p:nvSpPr>
+          <p:cNvPr id="7" name="Text 3"/>
+          <p:cNvSpPr/>
+          <p:nvPr/>
+        </p:nvSpPr>
+        <p:spPr>
+          <a:xfrm>
+            <a:off x="1393835" y="2423964"/>
+            <a:ext cx="9967645" cy="814388"/>
+          </a:xfrm>
+          <a:prstGeom prst="rect">
+            <a:avLst/>
+          </a:prstGeom>
+          <a:noFill/>
+          <a:ln/>
+        </p:spPr>
+        <p:txBody>
+          <a:bodyPr wrap="square" lIns="0" tIns="0" rIns="0" bIns="0" rtlCol="0" anchor="t"/>
+          <a:lstStyle/>
+          <a:p>
+            <a:pPr algn="l" indent="0" marL="0">
+              <a:lnSpc>
+                <a:spcPts val="2140"/>
+              </a:lnSpc>
+              <a:buNone/>
+            </a:pPr>
+            <a:r>
+              <a:rPr lang="en-US" sz="1430" dirty="0">
+                <a:solidFill>
+                  <a:srgbClr val="5B6270"/>
+                </a:solidFill>
+                <a:latin typeface="Libre Franklin" pitchFamily="34" charset="0"/>
+                <a:ea typeface="Libre Franklin" pitchFamily="34" charset="-122"/>
+                <a:cs typeface="Libre Franklin" pitchFamily="34" charset="-120"/>
+              </a:rPr>
+              <a:t>Your own controls sit in the graph beside the </a:t>
+            </a:r>
+            <a:pPr algn="l" indent="0" marL="0">
+              <a:lnSpc>
+                <a:spcPts val="2140"/>
+              </a:lnSpc>
+              <a:buNone/>
+            </a:pPr>
+            <a:r>
+              <a:rPr lang="en-US" sz="1430" b="1" dirty="0">
+                <a:solidFill>
+                  <a:srgbClr val="5B6270"/>
+                </a:solidFill>
+                <a:latin typeface="Libre Franklin" pitchFamily="34" charset="0"/>
+                <a:ea typeface="Libre Franklin" pitchFamily="34" charset="-122"/>
+                <a:cs typeface="Libre Franklin" pitchFamily="34" charset="-120"/>
+              </a:rPr>
+              <a:t>110+</a:t>
+            </a:r>
+            <a:pPr algn="l" indent="0" marL="0">
+              <a:lnSpc>
+                <a:spcPts val="2140"/>
+              </a:lnSpc>
+              <a:buNone/>
+            </a:pPr>
+            <a:r>
+              <a:rPr lang="en-US" sz="1430" dirty="0">
+                <a:solidFill>
+                  <a:srgbClr val="5B6270"/>
+                </a:solidFill>
+                <a:latin typeface="Libre Franklin" pitchFamily="34" charset="0"/>
+                <a:ea typeface="Libre Franklin" pitchFamily="34" charset="-122"/>
+                <a:cs typeface="Libre Franklin" pitchFamily="34" charset="-120"/>
+              </a:rPr>
+              <a:t> policies in the library, linked to systems, risks and evidence like anything else.</a:t>
+            </a:r>
+            <a:pPr algn="l" indent="0" marL="0">
+              <a:lnSpc>
+                <a:spcPts val="2140"/>
+              </a:lnSpc>
+              <a:buNone/>
+            </a:pPr>
+            <a:r>
+              <a:rPr lang="en-US" sz="1430" dirty="0">
+                <a:solidFill>
+                  <a:srgbClr val="5B6270"/>
+                </a:solidFill>
+                <a:latin typeface="Libre Franklin" pitchFamily="34" charset="0"/>
+                <a:ea typeface="Libre Franklin" pitchFamily="34" charset="-122"/>
+                <a:cs typeface="Libre Franklin" pitchFamily="34" charset="-120"/>
+              </a:rPr>
+              <a:t> Not documents attached to a record. Authoring your own policy frameworks is in preview.</a:t>
+            </a:r>
+            <a:endParaRPr lang="en-US" sz="1430" dirty="0"/>
+          </a:p>
+        </p:txBody>
+      </p:sp>
+      <p:sp>
+        <p:nvSpPr>
+          <p:cNvPr id="8" name="Text 4"/>
+          <p:cNvSpPr/>
+          <p:nvPr/>
+        </p:nvSpPr>
+        <p:spPr>
+          <a:xfrm>
+            <a:off x="830520" y="3446711"/>
+            <a:ext cx="430887" cy="289620"/>
+          </a:xfrm>
+          <a:prstGeom prst="rect">
+            <a:avLst/>
+          </a:prstGeom>
+          <a:noFill/>
+          <a:ln/>
+        </p:spPr>
+        <p:txBody>
+          <a:bodyPr wrap="square" lIns="0" tIns="0" rIns="0" bIns="0" rtlCol="0" anchor="t"/>
+          <a:lstStyle/>
+          <a:p>
+            <a:pPr algn="l" indent="0" marL="0">
+              <a:lnSpc>
+                <a:spcPts val="2280"/>
+              </a:lnSpc>
+              <a:buNone/>
+            </a:pPr>
+            <a:r>
+              <a:rPr lang="en-US" sz="2280" b="1" dirty="0">
+                <a:solidFill>
+                  <a:srgbClr val="3653E0"/>
+                </a:solidFill>
+                <a:latin typeface="Libre Franklin" pitchFamily="34" charset="0"/>
+                <a:ea typeface="Libre Franklin" pitchFamily="34" charset="-122"/>
+                <a:cs typeface="Libre Franklin" pitchFamily="34" charset="-120"/>
+              </a:rPr>
+              <a:t>02</a:t>
+            </a:r>
+            <a:endParaRPr lang="en-US" sz="2280" dirty="0"/>
+          </a:p>
+        </p:txBody>
+      </p:sp>
+      <p:sp>
+        <p:nvSpPr>
+          <p:cNvPr id="9" name="Text 5"/>
+          <p:cNvSpPr/>
+          <p:nvPr/>
+        </p:nvSpPr>
+        <p:spPr>
+          <a:xfrm>
+            <a:off x="1432828" y="3503861"/>
+            <a:ext cx="2765852" cy="271463"/>
+          </a:xfrm>
+          <a:prstGeom prst="rect">
+            <a:avLst/>
+          </a:prstGeom>
+          <a:noFill/>
+          <a:ln/>
+        </p:spPr>
+        <p:txBody>
+          <a:bodyPr wrap="square" lIns="0" tIns="0" rIns="0" bIns="0" rtlCol="0" anchor="t"/>
+          <a:lstStyle/>
+          <a:p>
+            <a:pPr algn="l" indent="0" marL="0">
+              <a:lnSpc>
+                <a:spcPts val="2140"/>
+              </a:lnSpc>
+              <a:buNone/>
+            </a:pPr>
+            <a:r>
+              <a:rPr lang="en-US" sz="1430" b="1" dirty="0">
+                <a:solidFill>
+                  <a:srgbClr val="111318"/>
+                </a:solidFill>
+                <a:latin typeface="Libre Franklin" pitchFamily="34" charset="0"/>
+                <a:ea typeface="Libre Franklin" pitchFamily="34" charset="-122"/>
+                <a:cs typeface="Libre Franklin" pitchFamily="34" charset="-120"/>
+              </a:rPr>
+              <a:t>Your process, as roles and tasks</a:t>
+            </a:r>
+            <a:endParaRPr lang="en-US" sz="1430" dirty="0"/>
+          </a:p>
+        </p:txBody>
+      </p:sp>
+      <p:sp>
+        <p:nvSpPr>
+          <p:cNvPr id="10" name="Text 6"/>
+          <p:cNvSpPr/>
+          <p:nvPr/>
+        </p:nvSpPr>
+        <p:spPr>
+          <a:xfrm>
+            <a:off x="1432828" y="3775323"/>
+            <a:ext cx="7525970" cy="814388"/>
+          </a:xfrm>
+          <a:prstGeom prst="rect">
+            <a:avLst/>
+          </a:prstGeom>
+          <a:noFill/>
+          <a:ln/>
+        </p:spPr>
+        <p:txBody>
+          <a:bodyPr wrap="square" lIns="0" tIns="0" rIns="0" bIns="0" rtlCol="0" anchor="t"/>
+          <a:lstStyle/>
+          <a:p>
+            <a:pPr algn="l" indent="0" marL="0">
+              <a:lnSpc>
+                <a:spcPts val="2140"/>
+              </a:lnSpc>
+              <a:buNone/>
+            </a:pPr>
+            <a:r>
+              <a:rPr lang="en-US" sz="1430" dirty="0">
+                <a:solidFill>
+                  <a:srgbClr val="5B6270"/>
+                </a:solidFill>
+                <a:latin typeface="Libre Franklin" pitchFamily="34" charset="0"/>
+                <a:ea typeface="Libre Franklin" pitchFamily="34" charset="-122"/>
+                <a:cs typeface="Libre Franklin" pitchFamily="34" charset="-120"/>
+              </a:rPr>
+              <a:t>Roles are assigned per system: owner, compliance specialist, reviewer, oversight manager.</a:t>
+            </a:r>
+            <a:pPr algn="l" indent="0" marL="0">
+              <a:lnSpc>
+                <a:spcPts val="2140"/>
+              </a:lnSpc>
+              <a:buNone/>
+            </a:pPr>
+            <a:r>
+              <a:rPr lang="en-US" sz="1430" dirty="0">
+                <a:solidFill>
+                  <a:srgbClr val="5B6270"/>
+                </a:solidFill>
+                <a:latin typeface="Libre Franklin" pitchFamily="34" charset="0"/>
+                <a:ea typeface="Libre Franklin" pitchFamily="34" charset="-122"/>
+                <a:cs typeface="Libre Franklin" pitchFamily="34" charset="-120"/>
+              </a:rPr>
+              <a:t> Lifecycle stages, approval gates and review cadence are set per organisation.</a:t>
+            </a:r>
+            <a:pPr algn="l" indent="0" marL="0">
+              <a:lnSpc>
+                <a:spcPts val="2140"/>
+              </a:lnSpc>
+              <a:buNone/>
+            </a:pPr>
+            <a:r>
+              <a:rPr lang="en-US" sz="1430" dirty="0">
+                <a:solidFill>
+                  <a:srgbClr val="5B6270"/>
+                </a:solidFill>
+                <a:latin typeface="Libre Franklin" pitchFamily="34" charset="0"/>
+                <a:ea typeface="Libre Franklin" pitchFamily="34" charset="-122"/>
+                <a:cs typeface="Libre Franklin" pitchFamily="34" charset="-120"/>
+              </a:rPr>
+              <a:t> Modelling the wider process as tasks is in development.</a:t>
+            </a:r>
+            <a:endParaRPr lang="en-US" sz="1430" dirty="0"/>
+          </a:p>
+        </p:txBody>
+      </p:sp>
+      <p:sp>
+        <p:nvSpPr>
+          <p:cNvPr id="11" name="Text 7"/>
+          <p:cNvSpPr/>
+          <p:nvPr/>
+        </p:nvSpPr>
+        <p:spPr>
+          <a:xfrm>
+            <a:off x="830520" y="4798070"/>
+            <a:ext cx="439519" cy="289620"/>
+          </a:xfrm>
+          <a:prstGeom prst="rect">
+            <a:avLst/>
+          </a:prstGeom>
+          <a:noFill/>
+          <a:ln/>
+        </p:spPr>
+        <p:txBody>
+          <a:bodyPr wrap="square" lIns="0" tIns="0" rIns="0" bIns="0" rtlCol="0" anchor="t"/>
+          <a:lstStyle/>
+          <a:p>
+            <a:pPr algn="l" indent="0" marL="0">
+              <a:lnSpc>
+                <a:spcPts val="2280"/>
+              </a:lnSpc>
+              <a:buNone/>
+            </a:pPr>
+            <a:r>
+              <a:rPr lang="en-US" sz="2280" b="1" dirty="0">
+                <a:solidFill>
+                  <a:srgbClr val="3653E0"/>
+                </a:solidFill>
+                <a:latin typeface="Libre Franklin" pitchFamily="34" charset="0"/>
+                <a:ea typeface="Libre Franklin" pitchFamily="34" charset="-122"/>
+                <a:cs typeface="Libre Franklin" pitchFamily="34" charset="-120"/>
+              </a:rPr>
+              <a:t>03</a:t>
+            </a:r>
+            <a:endParaRPr lang="en-US" sz="2280" dirty="0"/>
+          </a:p>
+        </p:txBody>
+      </p:sp>
+      <p:sp>
+        <p:nvSpPr>
+          <p:cNvPr id="12" name="Text 8"/>
+          <p:cNvSpPr/>
+          <p:nvPr/>
+        </p:nvSpPr>
+        <p:spPr>
+          <a:xfrm>
+            <a:off x="1441460" y="4855220"/>
+            <a:ext cx="2600355" cy="271463"/>
+          </a:xfrm>
+          <a:prstGeom prst="rect">
+            <a:avLst/>
+          </a:prstGeom>
+          <a:noFill/>
+          <a:ln/>
+        </p:spPr>
+        <p:txBody>
+          <a:bodyPr wrap="square" lIns="0" tIns="0" rIns="0" bIns="0" rtlCol="0" anchor="t"/>
+          <a:lstStyle/>
+          <a:p>
+            <a:pPr algn="l" indent="0" marL="0">
+              <a:lnSpc>
+                <a:spcPts val="2140"/>
+              </a:lnSpc>
+              <a:buNone/>
+            </a:pPr>
+            <a:r>
+              <a:rPr lang="en-US" sz="1430" b="1" dirty="0">
+                <a:solidFill>
+                  <a:srgbClr val="111318"/>
+                </a:solidFill>
+                <a:latin typeface="Libre Franklin" pitchFamily="34" charset="0"/>
+                <a:ea typeface="Libre Franklin" pitchFamily="34" charset="-122"/>
+                <a:cs typeface="Libre Franklin" pitchFamily="34" charset="-120"/>
+              </a:rPr>
+              <a:t>Your automation, at your pace</a:t>
+            </a:r>
+            <a:endParaRPr lang="en-US" sz="1430" dirty="0"/>
+          </a:p>
+        </p:txBody>
+      </p:sp>
+      <p:sp>
+        <p:nvSpPr>
+          <p:cNvPr id="13" name="Text 9"/>
+          <p:cNvSpPr/>
+          <p:nvPr/>
+        </p:nvSpPr>
+        <p:spPr>
+          <a:xfrm>
+            <a:off x="1441460" y="5126682"/>
+            <a:ext cx="8756184" cy="542925"/>
+          </a:xfrm>
+          <a:prstGeom prst="rect">
+            <a:avLst/>
+          </a:prstGeom>
+          <a:noFill/>
+          <a:ln/>
+        </p:spPr>
+        <p:txBody>
+          <a:bodyPr wrap="square" lIns="0" tIns="0" rIns="0" bIns="0" rtlCol="0" anchor="t"/>
+          <a:lstStyle/>
+          <a:p>
+            <a:pPr algn="l" indent="0" marL="0">
+              <a:lnSpc>
+                <a:spcPts val="2140"/>
+              </a:lnSpc>
+              <a:buNone/>
+            </a:pPr>
+            <a:r>
+              <a:rPr lang="en-US" sz="1430" dirty="0">
+                <a:solidFill>
+                  <a:srgbClr val="5B6270"/>
+                </a:solidFill>
+                <a:latin typeface="Libre Franklin" pitchFamily="34" charset="0"/>
+                <a:ea typeface="Libre Franklin" pitchFamily="34" charset="-122"/>
+                <a:cs typeface="Libre Franklin" pitchFamily="34" charset="-120"/>
+              </a:rPr>
+              <a:t>Every rule is a workflow you switch on: classification, inheritance, control assignment, lifecycle approvals.</a:t>
+            </a:r>
+            <a:pPr algn="l" indent="0" marL="0">
+              <a:lnSpc>
+                <a:spcPts val="2140"/>
+              </a:lnSpc>
+              <a:buNone/>
+            </a:pPr>
+            <a:r>
+              <a:rPr lang="en-US" sz="1430" dirty="0">
+                <a:solidFill>
+                  <a:srgbClr val="5B6270"/>
+                </a:solidFill>
+                <a:latin typeface="Libre Franklin" pitchFamily="34" charset="0"/>
+                <a:ea typeface="Libre Franklin" pitchFamily="34" charset="-122"/>
+                <a:cs typeface="Libre Franklin" pitchFamily="34" charset="-120"/>
+              </a:rPr>
+              <a:t> What is not automated stays a task for a person.</a:t>
+            </a:r>
+            <a:endParaRPr lang="en-US" sz="1430" dirty="0"/>
+          </a:p>
+        </p:txBody>
+      </p:sp>
+      <p:sp>
+        <p:nvSpPr>
+          <p:cNvPr id="14" name="Text 10"/>
+          <p:cNvSpPr/>
+          <p:nvPr/>
+        </p:nvSpPr>
+        <p:spPr>
+          <a:xfrm>
+            <a:off x="220920" y="6530429"/>
+            <a:ext cx="114627" cy="114300"/>
+          </a:xfrm>
+          <a:prstGeom prst="rect">
+            <a:avLst/>
+          </a:prstGeom>
+          <a:noFill/>
+          <a:ln/>
+        </p:spPr>
+        <p:txBody>
+          <a:bodyPr wrap="square" lIns="0" tIns="0" rIns="0" bIns="0" rtlCol="0" anchor="t"/>
+          <a:lstStyle/>
+          <a:p>
+            <a:pPr algn="l" indent="0" marL="0">
+              <a:lnSpc>
+                <a:spcPts val="900"/>
+              </a:lnSpc>
+              <a:buNone/>
+            </a:pPr>
+            <a:r>
+              <a:rPr lang="en-US" sz="900" dirty="0">
+                <a:solidFill>
+                  <a:srgbClr val="7F8796"/>
+                </a:solidFill>
+                <a:latin typeface="SF Mono" pitchFamily="34" charset="0"/>
+                <a:ea typeface="SF Mono" pitchFamily="34" charset="-122"/>
+                <a:cs typeface="SF Mono" pitchFamily="34" charset="-120"/>
+              </a:rPr>
+              <a:t>7</a:t>
+            </a:r>
+            <a:endParaRPr lang="en-US" sz="900" dirty="0"/>
+          </a:p>
+        </p:txBody>
+      </p:sp>
+    </p:spTree>
+  </p:cSld>
+  <p:clrMapOvr>
+    <a:masterClrMapping/>
+  </p:clrMapOvr>
+</p:sld>
+</file>
+
+<file path=ppt/slides/slide8.xml><?xml version="1.0" encoding="utf-8"?>
+<p:sld xmlns:a="http://schemas.openxmlformats.org/drawingml/2006/main" xmlns:r="http://schemas.openxmlformats.org/officeDocument/2006/relationships" xmlns:p="http://schemas.openxmlformats.org/presentationml/2006/main">
+  <p:cSld name="Slide 8">
+    <p:spTree>
+      <p:nvGrpSpPr>
+        <p:cNvPr id="1" name=""/>
+        <p:cNvGrpSpPr/>
+        <p:nvPr/>
+      </p:nvGrpSpPr>
+      <p:grpSpPr>
+        <a:xfrm>
+          <a:off x="0" y="0"/>
+          <a:ext cx="0" cy="0"/>
+          <a:chOff x="0" y="0"/>
+          <a:chExt cx="0" cy="0"/>
+        </a:xfrm>
+      </p:grpSpPr>
+      <p:pic>
+        <p:nvPicPr>
+          <p:cNvPr id="2" name="Image 0" descr="preencoded.png">    </p:cNvPr>
+          <p:cNvPicPr>
+            <a:picLocks noChangeAspect="1"/>
+          </p:cNvPicPr>
+          <p:nvPr/>
+        </p:nvPicPr>
+        <p:blipFill>
+          <a:blip r:embed="rId1"/>
+          <a:stretch>
+            <a:fillRect/>
+          </a:stretch>
+        </p:blipFill>
+        <p:spPr>
+          <a:xfrm>
+            <a:off x="0" y="0"/>
+            <a:ext cx="12192000" cy="6858000"/>
+          </a:xfrm>
+          <a:prstGeom prst="rect">
+            <a:avLst/>
+          </a:prstGeom>
+        </p:spPr>
+      </p:pic>
+      <p:pic>
+        <p:nvPicPr>
+          <p:cNvPr id="3" name="Image 1" descr="preencoded.png">    </p:cNvPr>
+          <p:cNvPicPr>
+            <a:picLocks noChangeAspect="1"/>
+          </p:cNvPicPr>
+          <p:nvPr/>
+        </p:nvPicPr>
+        <p:blipFill>
+          <a:blip r:embed="rId2"/>
+          <a:stretch>
+            <a:fillRect/>
+          </a:stretch>
+        </p:blipFill>
+        <p:spPr>
+          <a:xfrm>
+            <a:off x="10942415" y="6363421"/>
+            <a:ext cx="914400" cy="234892"/>
+          </a:xfrm>
+          <a:prstGeom prst="rect">
+            <a:avLst/>
+          </a:prstGeom>
+        </p:spPr>
+      </p:pic>
+      <p:sp>
+        <p:nvSpPr>
+          <p:cNvPr id="4" name="Text 0"/>
+          <p:cNvSpPr/>
+          <p:nvPr/>
+        </p:nvSpPr>
+        <p:spPr>
+          <a:xfrm>
+            <a:off x="830520" y="1879699"/>
+            <a:ext cx="10530959" cy="495598"/>
+          </a:xfrm>
+          <a:prstGeom prst="rect">
+            <a:avLst/>
+          </a:prstGeom>
+          <a:noFill/>
+          <a:ln/>
+        </p:spPr>
+        <p:txBody>
+          <a:bodyPr wrap="square" lIns="0" tIns="0" rIns="0" bIns="0" rtlCol="0" anchor="t"/>
+          <a:lstStyle/>
+          <a:p>
+            <a:pPr algn="l" indent="0" marL="0">
+              <a:lnSpc>
+                <a:spcPts val="3900"/>
+              </a:lnSpc>
+              <a:buNone/>
+            </a:pPr>
+            <a:r>
+              <a:rPr lang="en-US" sz="3550" dirty="0">
                 <a:solidFill>
                   <a:srgbClr val="FFFFFF"/>
                 </a:solidFill>
-                <a:latin typeface="Inter" pitchFamily="34" charset="0"/>
-                <a:ea typeface="Inter" pitchFamily="34" charset="-122"/>
-                <a:cs typeface="Inter" pitchFamily="34" charset="-120"/>
-              </a:rPr>
-              <a:t>Shipped</a:t>
-            </a:r>
-            <a:endParaRPr lang="en-US" sz="1440" dirty="0"/>
-          </a:p>
-        </p:txBody>
-      </p:sp>
-      <p:sp>
-        <p:nvSpPr>
-          <p:cNvPr id="5" name="Text 2"/>
-          <p:cNvSpPr/>
-          <p:nvPr/>
-        </p:nvSpPr>
-        <p:spPr>
-          <a:xfrm>
-            <a:off x="1060466" y="2437157"/>
-            <a:ext cx="2879966" cy="2775860"/>
-          </a:xfrm>
-          <a:prstGeom prst="rect">
-            <a:avLst/>
-          </a:prstGeom>
-          <a:noFill/>
-          <a:ln/>
-        </p:spPr>
-        <p:txBody>
-          <a:bodyPr wrap="square" lIns="0" tIns="0" rIns="0" bIns="0" rtlCol="0" anchor="t"/>
-          <a:lstStyle/>
-          <a:p>
-            <a:pPr algn="l" indent="0" marL="0">
-              <a:lnSpc>
-                <a:spcPts val="1990"/>
-              </a:lnSpc>
-              <a:buNone/>
-            </a:pPr>
-            <a:r>
-              <a:rPr lang="en-US" sz="1330" dirty="0">
-                <a:solidFill>
-                  <a:srgbClr val="010101"/>
-                </a:solidFill>
-                <a:latin typeface="Inter" pitchFamily="34" charset="0"/>
-                <a:ea typeface="Inter" pitchFamily="34" charset="-122"/>
-                <a:cs typeface="Inter" pitchFamily="34" charset="-120"/>
-              </a:rPr>
-              <a:t>Observability API, Q2 2026. Governance, Library and Docs MCP servers. Full REST API, including control catalogue read and write. Connectors for Azure AI Foundry and Amazon Bedrock (models &amp; agents). Custom policies, so a client's existing control catalogue enters the graph as controls, not as a document. Tasks for the human process.</a:t>
-            </a:r>
-            <a:endParaRPr lang="en-US" sz="1330" dirty="0"/>
-          </a:p>
-        </p:txBody>
-      </p:sp>
-      <p:sp>
-        <p:nvSpPr>
-          <p:cNvPr id="6" name="Text 3"/>
-          <p:cNvSpPr/>
-          <p:nvPr/>
-        </p:nvSpPr>
-        <p:spPr>
-          <a:xfrm>
-            <a:off x="4656017" y="2098781"/>
-            <a:ext cx="2879966" cy="274430"/>
-          </a:xfrm>
-          <a:prstGeom prst="rect">
-            <a:avLst/>
-          </a:prstGeom>
-          <a:noFill/>
-          <a:ln/>
-        </p:spPr>
-        <p:txBody>
-          <a:bodyPr wrap="square" lIns="0" tIns="0" rIns="0" bIns="0" rtlCol="0" anchor="t"/>
-          <a:lstStyle/>
-          <a:p>
-            <a:pPr algn="l" indent="0" marL="0">
-              <a:lnSpc>
-                <a:spcPts val="2160"/>
-              </a:lnSpc>
-              <a:buNone/>
-            </a:pPr>
-            <a:r>
-              <a:rPr lang="en-US" sz="1440" b="1" dirty="0">
+                <a:latin typeface="Libre Franklin" pitchFamily="34" charset="0"/>
+                <a:ea typeface="Libre Franklin" pitchFamily="34" charset="-122"/>
+                <a:cs typeface="Libre Franklin" pitchFamily="34" charset="-120"/>
+              </a:rPr>
+              <a:t>Governance stays a gate. It stops being a queue.</a:t>
+            </a:r>
+            <a:endParaRPr lang="en-US" sz="3550" dirty="0"/>
+          </a:p>
+        </p:txBody>
+      </p:sp>
+      <p:sp>
+        <p:nvSpPr>
+          <p:cNvPr id="5" name="Text 1"/>
+          <p:cNvSpPr/>
+          <p:nvPr/>
+        </p:nvSpPr>
+        <p:spPr>
+          <a:xfrm>
+            <a:off x="830520" y="2786658"/>
+            <a:ext cx="2476976" cy="271463"/>
+          </a:xfrm>
+          <a:prstGeom prst="rect">
+            <a:avLst/>
+          </a:prstGeom>
+          <a:noFill/>
+          <a:ln/>
+        </p:spPr>
+        <p:txBody>
+          <a:bodyPr wrap="square" lIns="0" tIns="0" rIns="0" bIns="0" rtlCol="0" anchor="t"/>
+          <a:lstStyle/>
+          <a:p>
+            <a:pPr algn="l" indent="0" marL="0">
+              <a:lnSpc>
+                <a:spcPts val="2140"/>
+              </a:lnSpc>
+              <a:buNone/>
+            </a:pPr>
+            <a:r>
+              <a:rPr lang="en-US" sz="1430" b="1" dirty="0">
                 <a:solidFill>
                   <a:srgbClr val="FFFFFF"/>
                 </a:solidFill>
-                <a:latin typeface="Inter" pitchFamily="34" charset="0"/>
-                <a:ea typeface="Inter" pitchFamily="34" charset="-122"/>
-                <a:cs typeface="Inter" pitchFamily="34" charset="-120"/>
-              </a:rPr>
-              <a:t>In development</a:t>
-            </a:r>
-            <a:endParaRPr lang="en-US" sz="1440" dirty="0"/>
-          </a:p>
-        </p:txBody>
-      </p:sp>
-      <p:sp>
-        <p:nvSpPr>
-          <p:cNvPr id="7" name="Text 4"/>
-          <p:cNvSpPr/>
-          <p:nvPr/>
-        </p:nvSpPr>
-        <p:spPr>
-          <a:xfrm>
-            <a:off x="4656017" y="2437157"/>
-            <a:ext cx="2879966" cy="757053"/>
-          </a:xfrm>
-          <a:prstGeom prst="rect">
-            <a:avLst/>
-          </a:prstGeom>
-          <a:noFill/>
-          <a:ln/>
-        </p:spPr>
-        <p:txBody>
-          <a:bodyPr wrap="square" lIns="0" tIns="0" rIns="0" bIns="0" rtlCol="0" anchor="t"/>
-          <a:lstStyle/>
-          <a:p>
-            <a:pPr algn="l" indent="0" marL="0">
-              <a:lnSpc>
-                <a:spcPts val="1990"/>
-              </a:lnSpc>
-              <a:buNone/>
-            </a:pPr>
-            <a:r>
-              <a:rPr lang="en-US" sz="1330" dirty="0">
-                <a:solidFill>
-                  <a:srgbClr val="010101"/>
-                </a:solidFill>
-                <a:latin typeface="Inter" pitchFamily="34" charset="0"/>
-                <a:ea typeface="Inter" pitchFamily="34" charset="-122"/>
-                <a:cs typeface="Inter" pitchFamily="34" charset="-120"/>
-              </a:rPr>
-              <a:t>Tasks by role. Lifecycles, roles, thresholds and templates per organisation.</a:t>
-            </a:r>
-            <a:endParaRPr lang="en-US" sz="1330" dirty="0"/>
-          </a:p>
-        </p:txBody>
-      </p:sp>
-      <p:sp>
-        <p:nvSpPr>
-          <p:cNvPr id="8" name="Text 5"/>
-          <p:cNvSpPr/>
-          <p:nvPr/>
-        </p:nvSpPr>
-        <p:spPr>
-          <a:xfrm>
-            <a:off x="8251568" y="2098781"/>
-            <a:ext cx="2879966" cy="274430"/>
-          </a:xfrm>
-          <a:prstGeom prst="rect">
-            <a:avLst/>
-          </a:prstGeom>
-          <a:noFill/>
-          <a:ln/>
-        </p:spPr>
-        <p:txBody>
-          <a:bodyPr wrap="square" lIns="0" tIns="0" rIns="0" bIns="0" rtlCol="0" anchor="t"/>
-          <a:lstStyle/>
-          <a:p>
-            <a:pPr algn="l" indent="0" marL="0">
-              <a:lnSpc>
-                <a:spcPts val="2160"/>
-              </a:lnSpc>
-              <a:buNone/>
-            </a:pPr>
-            <a:r>
-              <a:rPr lang="en-US" sz="1440" b="1" dirty="0">
+                <a:latin typeface="Libre Franklin" pitchFamily="34" charset="0"/>
+                <a:ea typeface="Libre Franklin" pitchFamily="34" charset="-122"/>
+                <a:cs typeface="Libre Franklin" pitchFamily="34" charset="-120"/>
+              </a:rPr>
+              <a:t>Rules-based tiering</a:t>
+            </a:r>
+            <a:endParaRPr lang="en-US" sz="1430" dirty="0"/>
+          </a:p>
+        </p:txBody>
+      </p:sp>
+      <p:sp>
+        <p:nvSpPr>
+          <p:cNvPr id="6" name="Text 2"/>
+          <p:cNvSpPr/>
+          <p:nvPr/>
+        </p:nvSpPr>
+        <p:spPr>
+          <a:xfrm>
+            <a:off x="830520" y="3121372"/>
+            <a:ext cx="2476976" cy="1357313"/>
+          </a:xfrm>
+          <a:prstGeom prst="rect">
+            <a:avLst/>
+          </a:prstGeom>
+          <a:noFill/>
+          <a:ln/>
+        </p:spPr>
+        <p:txBody>
+          <a:bodyPr wrap="square" lIns="0" tIns="0" rIns="0" bIns="0" rtlCol="0" anchor="t"/>
+          <a:lstStyle/>
+          <a:p>
+            <a:pPr algn="l" indent="0" marL="0">
+              <a:lnSpc>
+                <a:spcPts val="2140"/>
+              </a:lnSpc>
+              <a:buNone/>
+            </a:pPr>
+            <a:r>
+              <a:rPr lang="en-US" sz="1430" dirty="0">
+                <a:solidFill>
+                  <a:srgbClr val="C7CFF6"/>
+                </a:solidFill>
+                <a:latin typeface="Libre Franklin" pitchFamily="34" charset="0"/>
+                <a:ea typeface="Libre Franklin" pitchFamily="34" charset="-122"/>
+                <a:cs typeface="Libre Franklin" pitchFamily="34" charset="-120"/>
+              </a:rPr>
+              <a:t>Properties decide the tier.</a:t>
+            </a:r>
+            <a:pPr algn="l" indent="0" marL="0">
+              <a:lnSpc>
+                <a:spcPts val="2140"/>
+              </a:lnSpc>
+              <a:buNone/>
+            </a:pPr>
+            <a:r>
+              <a:rPr lang="en-US" sz="1430" dirty="0">
+                <a:solidFill>
+                  <a:srgbClr val="C7CFF6"/>
+                </a:solidFill>
+                <a:latin typeface="Libre Franklin" pitchFamily="34" charset="0"/>
+                <a:ea typeface="Libre Franklin" pitchFamily="34" charset="-122"/>
+                <a:cs typeface="Libre Franklin" pitchFamily="34" charset="-120"/>
+              </a:rPr>
+              <a:t> A person ratifies it, because that one property scopes every obligation downstream.</a:t>
+            </a:r>
+            <a:endParaRPr lang="en-US" sz="1430" dirty="0"/>
+          </a:p>
+        </p:txBody>
+      </p:sp>
+      <p:sp>
+        <p:nvSpPr>
+          <p:cNvPr id="7" name="Text 3"/>
+          <p:cNvSpPr/>
+          <p:nvPr/>
+        </p:nvSpPr>
+        <p:spPr>
+          <a:xfrm>
+            <a:off x="3515082" y="2786658"/>
+            <a:ext cx="2477125" cy="271463"/>
+          </a:xfrm>
+          <a:prstGeom prst="rect">
+            <a:avLst/>
+          </a:prstGeom>
+          <a:noFill/>
+          <a:ln/>
+        </p:spPr>
+        <p:txBody>
+          <a:bodyPr wrap="square" lIns="0" tIns="0" rIns="0" bIns="0" rtlCol="0" anchor="t"/>
+          <a:lstStyle/>
+          <a:p>
+            <a:pPr algn="l" indent="0" marL="0">
+              <a:lnSpc>
+                <a:spcPts val="2140"/>
+              </a:lnSpc>
+              <a:buNone/>
+            </a:pPr>
+            <a:r>
+              <a:rPr lang="en-US" sz="1430" b="1" dirty="0">
                 <a:solidFill>
                   <a:srgbClr val="FFFFFF"/>
                 </a:solidFill>
-                <a:latin typeface="Inter" pitchFamily="34" charset="0"/>
-                <a:ea typeface="Inter" pitchFamily="34" charset="-122"/>
-                <a:cs typeface="Inter" pitchFamily="34" charset="-120"/>
-              </a:rPr>
-              <a:t>Policy as code, roadmap</a:t>
-            </a:r>
-            <a:endParaRPr lang="en-US" sz="1440" dirty="0"/>
-          </a:p>
-        </p:txBody>
-      </p:sp>
-      <p:sp>
-        <p:nvSpPr>
-          <p:cNvPr id="9" name="Text 6"/>
-          <p:cNvSpPr/>
-          <p:nvPr/>
-        </p:nvSpPr>
-        <p:spPr>
-          <a:xfrm>
-            <a:off x="8251568" y="2437157"/>
-            <a:ext cx="2879966" cy="504702"/>
-          </a:xfrm>
-          <a:prstGeom prst="rect">
-            <a:avLst/>
-          </a:prstGeom>
-          <a:noFill/>
-          <a:ln/>
-        </p:spPr>
-        <p:txBody>
-          <a:bodyPr wrap="square" lIns="0" tIns="0" rIns="0" bIns="0" rtlCol="0" anchor="t"/>
-          <a:lstStyle/>
-          <a:p>
-            <a:pPr algn="l" indent="0" marL="0">
-              <a:lnSpc>
-                <a:spcPts val="1990"/>
-              </a:lnSpc>
-              <a:buNone/>
-            </a:pPr>
-            <a:r>
-              <a:rPr lang="en-US" sz="1330" dirty="0">
-                <a:solidFill>
-                  <a:srgbClr val="010101"/>
-                </a:solidFill>
-                <a:latin typeface="Inter" pitchFamily="34" charset="0"/>
-                <a:ea typeface="Inter" pitchFamily="34" charset="-122"/>
-                <a:cs typeface="Inter" pitchFamily="34" charset="-120"/>
-              </a:rPr>
-              <a:t>Controls: supporting compilation to each runtime's own policy engine.</a:t>
-            </a:r>
-            <a:endParaRPr lang="en-US" sz="1330" dirty="0"/>
-          </a:p>
-        </p:txBody>
-      </p:sp>
-      <p:sp>
-        <p:nvSpPr>
-          <p:cNvPr id="10" name="Text 7"/>
-          <p:cNvSpPr/>
-          <p:nvPr/>
-        </p:nvSpPr>
-        <p:spPr>
-          <a:xfrm>
-            <a:off x="830521" y="5744377"/>
-            <a:ext cx="10530958" cy="227819"/>
-          </a:xfrm>
-          <a:prstGeom prst="rect">
-            <a:avLst/>
-          </a:prstGeom>
-          <a:noFill/>
-          <a:ln/>
-        </p:spPr>
-        <p:txBody>
-          <a:bodyPr wrap="square" lIns="0" tIns="0" rIns="0" bIns="0" rtlCol="0" anchor="t"/>
-          <a:lstStyle/>
-          <a:p>
-            <a:pPr algn="l" indent="0" marL="0">
-              <a:lnSpc>
-                <a:spcPts val="1790"/>
-              </a:lnSpc>
-              <a:buNone/>
-            </a:pPr>
-            <a:r>
-              <a:rPr lang="en-US" sz="1200" dirty="0">
-                <a:solidFill>
-                  <a:srgbClr val="010101"/>
-                </a:solidFill>
-                <a:latin typeface="Inter" pitchFamily="34" charset="0"/>
-                <a:ea typeface="Inter" pitchFamily="34" charset="-122"/>
-                <a:cs typeface="Inter" pitchFamily="34" charset="-120"/>
-              </a:rPr>
-              <a:t>One register, one control library, one risk model. Each runtime keeps enforcing its own.</a:t>
-            </a:r>
-            <a:endParaRPr lang="en-US" sz="1200" dirty="0"/>
+                <a:latin typeface="Libre Franklin" pitchFamily="34" charset="0"/>
+                <a:ea typeface="Libre Franklin" pitchFamily="34" charset="-122"/>
+                <a:cs typeface="Libre Franklin" pitchFamily="34" charset="-120"/>
+              </a:rPr>
+              <a:t>Rules-based control profiles</a:t>
+            </a:r>
+            <a:endParaRPr lang="en-US" sz="1430" dirty="0"/>
+          </a:p>
+        </p:txBody>
+      </p:sp>
+      <p:sp>
+        <p:nvSpPr>
+          <p:cNvPr id="8" name="Text 4"/>
+          <p:cNvSpPr/>
+          <p:nvPr/>
+        </p:nvSpPr>
+        <p:spPr>
+          <a:xfrm>
+            <a:off x="3515082" y="3121372"/>
+            <a:ext cx="2477125" cy="1357313"/>
+          </a:xfrm>
+          <a:prstGeom prst="rect">
+            <a:avLst/>
+          </a:prstGeom>
+          <a:noFill/>
+          <a:ln/>
+        </p:spPr>
+        <p:txBody>
+          <a:bodyPr wrap="square" lIns="0" tIns="0" rIns="0" bIns="0" rtlCol="0" anchor="t"/>
+          <a:lstStyle/>
+          <a:p>
+            <a:pPr algn="l" indent="0" marL="0">
+              <a:lnSpc>
+                <a:spcPts val="2140"/>
+              </a:lnSpc>
+              <a:buNone/>
+            </a:pPr>
+            <a:r>
+              <a:rPr lang="en-US" sz="1430" dirty="0">
+                <a:solidFill>
+                  <a:srgbClr val="C7CFF6"/>
+                </a:solidFill>
+                <a:latin typeface="Libre Franklin" pitchFamily="34" charset="0"/>
+                <a:ea typeface="Libre Franklin" pitchFamily="34" charset="-122"/>
+                <a:cs typeface="Libre Franklin" pitchFamily="34" charset="-120"/>
+              </a:rPr>
+              <a:t>The tier resolves its own control set.</a:t>
+            </a:r>
+            <a:pPr algn="l" indent="0" marL="0">
+              <a:lnSpc>
+                <a:spcPts val="2140"/>
+              </a:lnSpc>
+              <a:buNone/>
+            </a:pPr>
+            <a:r>
+              <a:rPr lang="en-US" sz="1430" dirty="0">
+                <a:solidFill>
+                  <a:srgbClr val="C7CFF6"/>
+                </a:solidFill>
+                <a:latin typeface="Libre Franklin" pitchFamily="34" charset="0"/>
+                <a:ea typeface="Libre Franklin" pitchFamily="34" charset="-122"/>
+                <a:cs typeface="Libre Franklin" pitchFamily="34" charset="-120"/>
+              </a:rPr>
+              <a:t> Nobody has to manually maps controls per system (but they can edit the set).</a:t>
+            </a:r>
+            <a:endParaRPr lang="en-US" sz="1430" dirty="0"/>
+          </a:p>
+        </p:txBody>
+      </p:sp>
+      <p:sp>
+        <p:nvSpPr>
+          <p:cNvPr id="9" name="Text 5"/>
+          <p:cNvSpPr/>
+          <p:nvPr/>
+        </p:nvSpPr>
+        <p:spPr>
+          <a:xfrm>
+            <a:off x="6199793" y="2786658"/>
+            <a:ext cx="2476976" cy="271463"/>
+          </a:xfrm>
+          <a:prstGeom prst="rect">
+            <a:avLst/>
+          </a:prstGeom>
+          <a:noFill/>
+          <a:ln/>
+        </p:spPr>
+        <p:txBody>
+          <a:bodyPr wrap="square" lIns="0" tIns="0" rIns="0" bIns="0" rtlCol="0" anchor="t"/>
+          <a:lstStyle/>
+          <a:p>
+            <a:pPr algn="l" indent="0" marL="0">
+              <a:lnSpc>
+                <a:spcPts val="2140"/>
+              </a:lnSpc>
+              <a:buNone/>
+            </a:pPr>
+            <a:r>
+              <a:rPr lang="en-US" sz="1430" b="1" dirty="0">
+                <a:solidFill>
+                  <a:srgbClr val="FFFFFF"/>
+                </a:solidFill>
+                <a:latin typeface="Libre Franklin" pitchFamily="34" charset="0"/>
+                <a:ea typeface="Libre Franklin" pitchFamily="34" charset="-122"/>
+                <a:cs typeface="Libre Franklin" pitchFamily="34" charset="-120"/>
+              </a:rPr>
+              <a:t>Lifecycle approvals</a:t>
+            </a:r>
+            <a:endParaRPr lang="en-US" sz="1430" dirty="0"/>
+          </a:p>
+        </p:txBody>
+      </p:sp>
+      <p:sp>
+        <p:nvSpPr>
+          <p:cNvPr id="10" name="Text 6"/>
+          <p:cNvSpPr/>
+          <p:nvPr/>
+        </p:nvSpPr>
+        <p:spPr>
+          <a:xfrm>
+            <a:off x="6199793" y="3121372"/>
+            <a:ext cx="2476976" cy="1085850"/>
+          </a:xfrm>
+          <a:prstGeom prst="rect">
+            <a:avLst/>
+          </a:prstGeom>
+          <a:noFill/>
+          <a:ln/>
+        </p:spPr>
+        <p:txBody>
+          <a:bodyPr wrap="square" lIns="0" tIns="0" rIns="0" bIns="0" rtlCol="0" anchor="t"/>
+          <a:lstStyle/>
+          <a:p>
+            <a:pPr algn="l" indent="0" marL="0">
+              <a:lnSpc>
+                <a:spcPts val="2140"/>
+              </a:lnSpc>
+              <a:buNone/>
+            </a:pPr>
+            <a:r>
+              <a:rPr lang="en-US" sz="1430" dirty="0">
+                <a:solidFill>
+                  <a:srgbClr val="C7CFF6"/>
+                </a:solidFill>
+                <a:latin typeface="Libre Franklin" pitchFamily="34" charset="0"/>
+                <a:ea typeface="Libre Franklin" pitchFamily="34" charset="-122"/>
+                <a:cs typeface="Libre Franklin" pitchFamily="34" charset="-120"/>
+              </a:rPr>
+              <a:t>A stage transition gates on approval, and reviews go to the role that owns them, when due.</a:t>
+            </a:r>
+            <a:endParaRPr lang="en-US" sz="1430" dirty="0"/>
+          </a:p>
+        </p:txBody>
+      </p:sp>
+      <p:sp>
+        <p:nvSpPr>
+          <p:cNvPr id="11" name="Text 7"/>
+          <p:cNvSpPr/>
+          <p:nvPr/>
+        </p:nvSpPr>
+        <p:spPr>
+          <a:xfrm>
+            <a:off x="8884354" y="2786658"/>
+            <a:ext cx="2477125" cy="271463"/>
+          </a:xfrm>
+          <a:prstGeom prst="rect">
+            <a:avLst/>
+          </a:prstGeom>
+          <a:noFill/>
+          <a:ln/>
+        </p:spPr>
+        <p:txBody>
+          <a:bodyPr wrap="square" lIns="0" tIns="0" rIns="0" bIns="0" rtlCol="0" anchor="t"/>
+          <a:lstStyle/>
+          <a:p>
+            <a:pPr algn="l" indent="0" marL="0">
+              <a:lnSpc>
+                <a:spcPts val="2140"/>
+              </a:lnSpc>
+              <a:buNone/>
+            </a:pPr>
+            <a:r>
+              <a:rPr lang="en-US" sz="1430" b="1" dirty="0">
+                <a:solidFill>
+                  <a:srgbClr val="FFFFFF"/>
+                </a:solidFill>
+                <a:latin typeface="Libre Franklin" pitchFamily="34" charset="0"/>
+                <a:ea typeface="Libre Franklin" pitchFamily="34" charset="-122"/>
+                <a:cs typeface="Libre Franklin" pitchFamily="34" charset="-120"/>
+              </a:rPr>
+              <a:t>Event-based triggers</a:t>
+            </a:r>
+            <a:endParaRPr lang="en-US" sz="1430" dirty="0"/>
+          </a:p>
+        </p:txBody>
+      </p:sp>
+      <p:sp>
+        <p:nvSpPr>
+          <p:cNvPr id="12" name="Text 8"/>
+          <p:cNvSpPr/>
+          <p:nvPr/>
+        </p:nvSpPr>
+        <p:spPr>
+          <a:xfrm>
+            <a:off x="8884354" y="3121372"/>
+            <a:ext cx="2477125" cy="1085850"/>
+          </a:xfrm>
+          <a:prstGeom prst="rect">
+            <a:avLst/>
+          </a:prstGeom>
+          <a:noFill/>
+          <a:ln/>
+        </p:spPr>
+        <p:txBody>
+          <a:bodyPr wrap="square" lIns="0" tIns="0" rIns="0" bIns="0" rtlCol="0" anchor="t"/>
+          <a:lstStyle/>
+          <a:p>
+            <a:pPr algn="l" indent="0" marL="0">
+              <a:lnSpc>
+                <a:spcPts val="2140"/>
+              </a:lnSpc>
+              <a:buNone/>
+            </a:pPr>
+            <a:r>
+              <a:rPr lang="en-US" sz="1430" dirty="0">
+                <a:solidFill>
+                  <a:srgbClr val="C7CFF6"/>
+                </a:solidFill>
+                <a:latin typeface="Libre Franklin" pitchFamily="34" charset="0"/>
+                <a:ea typeface="Libre Franklin" pitchFamily="34" charset="-122"/>
+                <a:cs typeface="Libre Franklin" pitchFamily="34" charset="-120"/>
+              </a:rPr>
+              <a:t>Drift, an incident or a change reopens the assessment.</a:t>
+            </a:r>
+            <a:pPr algn="l" indent="0" marL="0">
+              <a:lnSpc>
+                <a:spcPts val="2140"/>
+              </a:lnSpc>
+              <a:buNone/>
+            </a:pPr>
+            <a:r>
+              <a:rPr lang="en-US" sz="1430" dirty="0">
+                <a:solidFill>
+                  <a:srgbClr val="C7CFF6"/>
+                </a:solidFill>
+                <a:latin typeface="Libre Franklin" pitchFamily="34" charset="0"/>
+                <a:ea typeface="Libre Franklin" pitchFamily="34" charset="-122"/>
+                <a:cs typeface="Libre Franklin" pitchFamily="34" charset="-120"/>
+              </a:rPr>
+              <a:t> Production keeps the record current.</a:t>
+            </a:r>
+            <a:endParaRPr lang="en-US" sz="1430" dirty="0"/>
+          </a:p>
+        </p:txBody>
+      </p:sp>
+      <p:sp>
+        <p:nvSpPr>
+          <p:cNvPr id="13" name="Text 9"/>
+          <p:cNvSpPr/>
+          <p:nvPr/>
+        </p:nvSpPr>
+        <p:spPr>
+          <a:xfrm>
+            <a:off x="830520" y="4752975"/>
+            <a:ext cx="10530959" cy="225177"/>
+          </a:xfrm>
+          <a:prstGeom prst="rect">
+            <a:avLst/>
+          </a:prstGeom>
+          <a:noFill/>
+          <a:ln/>
+        </p:spPr>
+        <p:txBody>
+          <a:bodyPr wrap="square" lIns="0" tIns="0" rIns="0" bIns="0" rtlCol="0" anchor="t"/>
+          <a:lstStyle/>
+          <a:p>
+            <a:pPr algn="l" indent="0" marL="0">
+              <a:lnSpc>
+                <a:spcPts val="1770"/>
+              </a:lnSpc>
+              <a:buNone/>
+            </a:pPr>
+            <a:r>
+              <a:rPr lang="en-US" sz="1180" i="1" dirty="0">
+                <a:solidFill>
+                  <a:srgbClr val="C7CFF6"/>
+                </a:solidFill>
+                <a:latin typeface="Libre Franklin" pitchFamily="34" charset="0"/>
+                <a:ea typeface="Libre Franklin" pitchFamily="34" charset="-122"/>
+                <a:cs typeface="Libre Franklin" pitchFamily="34" charset="-120"/>
+              </a:rPr>
+              <a:t>Where this goes: the same loop at the scale of the whole AI estate of an organisation - with more of it automated and a person still deciding.</a:t>
+            </a:r>
+            <a:endParaRPr lang="en-US" sz="1180" dirty="0"/>
+          </a:p>
+        </p:txBody>
+      </p:sp>
+      <p:sp>
+        <p:nvSpPr>
+          <p:cNvPr id="14" name="Text 10"/>
+          <p:cNvSpPr/>
+          <p:nvPr/>
+        </p:nvSpPr>
+        <p:spPr>
+          <a:xfrm>
+            <a:off x="220920" y="6530429"/>
+            <a:ext cx="114627" cy="114300"/>
+          </a:xfrm>
+          <a:prstGeom prst="rect">
+            <a:avLst/>
+          </a:prstGeom>
+          <a:noFill/>
+          <a:ln/>
+        </p:spPr>
+        <p:txBody>
+          <a:bodyPr wrap="square" lIns="0" tIns="0" rIns="0" bIns="0" rtlCol="0" anchor="t"/>
+          <a:lstStyle/>
+          <a:p>
+            <a:pPr algn="l" indent="0" marL="0">
+              <a:lnSpc>
+                <a:spcPts val="900"/>
+              </a:lnSpc>
+              <a:buNone/>
+            </a:pPr>
+            <a:r>
+              <a:rPr lang="en-US" sz="900" dirty="0">
+                <a:solidFill>
+                  <a:srgbClr val="90A0EE"/>
+                </a:solidFill>
+                <a:latin typeface="SF Mono" pitchFamily="34" charset="0"/>
+                <a:ea typeface="SF Mono" pitchFamily="34" charset="-122"/>
+                <a:cs typeface="SF Mono" pitchFamily="34" charset="-120"/>
+              </a:rPr>
+              <a:t>8</a:t>
+            </a:r>
+            <a:endParaRPr lang="en-US" sz="900" dirty="0"/>
           </a:p>
         </p:txBody>
       </p:sp>
